--- a/presentation/Генерация кода.pptx
+++ b/presentation/Генерация кода.pptx
@@ -20,6 +20,7 @@
     <p:sldId id="265" r:id="rId17"/>
     <p:sldId id="266" r:id="rId18"/>
     <p:sldId id="267" r:id="rId19"/>
+    <p:sldId id="268" r:id="rId20"/>
   </p:sldIdLst>
   <p:sldSz cx="24384000" cy="13716000"/>
   <p:notesSz cx="6858000" cy="9144000"/>
@@ -50,7 +51,7 @@
         <a:uFillTx/>
       </a:defRPr>
     </a:defPPr>
-    <a:lvl1pPr marL="0" marR="0" indent="0" algn="l" defTabSz="2438338" rtl="0" fontAlgn="auto" latinLnBrk="0" hangingPunct="0">
+    <a:lvl1pPr marL="0" marR="0" indent="0" algn="l" defTabSz="2438337" rtl="0" fontAlgn="auto" latinLnBrk="0" hangingPunct="0">
       <a:lnSpc>
         <a:spcPct val="90000"/>
       </a:lnSpc>
@@ -74,13 +75,13 @@
         </a:solidFill>
         <a:effectLst/>
         <a:uFillTx/>
-        <a:latin typeface="+mn-lt"/>
-        <a:ea typeface="+mn-ea"/>
-        <a:cs typeface="+mn-cs"/>
+        <a:latin typeface="+mj-lt"/>
+        <a:ea typeface="+mj-ea"/>
+        <a:cs typeface="+mj-cs"/>
         <a:sym typeface="Helvetica Neue"/>
       </a:defRPr>
     </a:lvl1pPr>
-    <a:lvl2pPr marL="0" marR="0" indent="457200" algn="l" defTabSz="2438338" rtl="0" fontAlgn="auto" latinLnBrk="0" hangingPunct="0">
+    <a:lvl2pPr marL="0" marR="0" indent="0" algn="l" defTabSz="2438337" rtl="0" fontAlgn="auto" latinLnBrk="0" hangingPunct="0">
       <a:lnSpc>
         <a:spcPct val="90000"/>
       </a:lnSpc>
@@ -104,13 +105,13 @@
         </a:solidFill>
         <a:effectLst/>
         <a:uFillTx/>
-        <a:latin typeface="+mn-lt"/>
-        <a:ea typeface="+mn-ea"/>
-        <a:cs typeface="+mn-cs"/>
+        <a:latin typeface="+mj-lt"/>
+        <a:ea typeface="+mj-ea"/>
+        <a:cs typeface="+mj-cs"/>
         <a:sym typeface="Helvetica Neue"/>
       </a:defRPr>
     </a:lvl2pPr>
-    <a:lvl3pPr marL="0" marR="0" indent="914400" algn="l" defTabSz="2438338" rtl="0" fontAlgn="auto" latinLnBrk="0" hangingPunct="0">
+    <a:lvl3pPr marL="0" marR="0" indent="0" algn="l" defTabSz="2438337" rtl="0" fontAlgn="auto" latinLnBrk="0" hangingPunct="0">
       <a:lnSpc>
         <a:spcPct val="90000"/>
       </a:lnSpc>
@@ -134,13 +135,13 @@
         </a:solidFill>
         <a:effectLst/>
         <a:uFillTx/>
-        <a:latin typeface="+mn-lt"/>
-        <a:ea typeface="+mn-ea"/>
-        <a:cs typeface="+mn-cs"/>
+        <a:latin typeface="+mj-lt"/>
+        <a:ea typeface="+mj-ea"/>
+        <a:cs typeface="+mj-cs"/>
         <a:sym typeface="Helvetica Neue"/>
       </a:defRPr>
     </a:lvl3pPr>
-    <a:lvl4pPr marL="0" marR="0" indent="1371600" algn="l" defTabSz="2438338" rtl="0" fontAlgn="auto" latinLnBrk="0" hangingPunct="0">
+    <a:lvl4pPr marL="0" marR="0" indent="0" algn="l" defTabSz="2438337" rtl="0" fontAlgn="auto" latinLnBrk="0" hangingPunct="0">
       <a:lnSpc>
         <a:spcPct val="90000"/>
       </a:lnSpc>
@@ -164,13 +165,13 @@
         </a:solidFill>
         <a:effectLst/>
         <a:uFillTx/>
-        <a:latin typeface="+mn-lt"/>
-        <a:ea typeface="+mn-ea"/>
-        <a:cs typeface="+mn-cs"/>
+        <a:latin typeface="+mj-lt"/>
+        <a:ea typeface="+mj-ea"/>
+        <a:cs typeface="+mj-cs"/>
         <a:sym typeface="Helvetica Neue"/>
       </a:defRPr>
     </a:lvl4pPr>
-    <a:lvl5pPr marL="0" marR="0" indent="1828800" algn="l" defTabSz="2438338" rtl="0" fontAlgn="auto" latinLnBrk="0" hangingPunct="0">
+    <a:lvl5pPr marL="0" marR="0" indent="0" algn="l" defTabSz="2438337" rtl="0" fontAlgn="auto" latinLnBrk="0" hangingPunct="0">
       <a:lnSpc>
         <a:spcPct val="90000"/>
       </a:lnSpc>
@@ -194,13 +195,13 @@
         </a:solidFill>
         <a:effectLst/>
         <a:uFillTx/>
-        <a:latin typeface="+mn-lt"/>
-        <a:ea typeface="+mn-ea"/>
-        <a:cs typeface="+mn-cs"/>
+        <a:latin typeface="+mj-lt"/>
+        <a:ea typeface="+mj-ea"/>
+        <a:cs typeface="+mj-cs"/>
         <a:sym typeface="Helvetica Neue"/>
       </a:defRPr>
     </a:lvl5pPr>
-    <a:lvl6pPr marL="0" marR="0" indent="2286000" algn="l" defTabSz="2438338" rtl="0" fontAlgn="auto" latinLnBrk="0" hangingPunct="0">
+    <a:lvl6pPr marL="0" marR="0" indent="0" algn="l" defTabSz="2438337" rtl="0" fontAlgn="auto" latinLnBrk="0" hangingPunct="0">
       <a:lnSpc>
         <a:spcPct val="90000"/>
       </a:lnSpc>
@@ -224,13 +225,13 @@
         </a:solidFill>
         <a:effectLst/>
         <a:uFillTx/>
-        <a:latin typeface="+mn-lt"/>
-        <a:ea typeface="+mn-ea"/>
-        <a:cs typeface="+mn-cs"/>
+        <a:latin typeface="+mj-lt"/>
+        <a:ea typeface="+mj-ea"/>
+        <a:cs typeface="+mj-cs"/>
         <a:sym typeface="Helvetica Neue"/>
       </a:defRPr>
     </a:lvl6pPr>
-    <a:lvl7pPr marL="0" marR="0" indent="2743200" algn="l" defTabSz="2438338" rtl="0" fontAlgn="auto" latinLnBrk="0" hangingPunct="0">
+    <a:lvl7pPr marL="0" marR="0" indent="0" algn="l" defTabSz="2438337" rtl="0" fontAlgn="auto" latinLnBrk="0" hangingPunct="0">
       <a:lnSpc>
         <a:spcPct val="90000"/>
       </a:lnSpc>
@@ -254,13 +255,13 @@
         </a:solidFill>
         <a:effectLst/>
         <a:uFillTx/>
-        <a:latin typeface="+mn-lt"/>
-        <a:ea typeface="+mn-ea"/>
-        <a:cs typeface="+mn-cs"/>
+        <a:latin typeface="+mj-lt"/>
+        <a:ea typeface="+mj-ea"/>
+        <a:cs typeface="+mj-cs"/>
         <a:sym typeface="Helvetica Neue"/>
       </a:defRPr>
     </a:lvl7pPr>
-    <a:lvl8pPr marL="0" marR="0" indent="3200400" algn="l" defTabSz="2438338" rtl="0" fontAlgn="auto" latinLnBrk="0" hangingPunct="0">
+    <a:lvl8pPr marL="0" marR="0" indent="0" algn="l" defTabSz="2438337" rtl="0" fontAlgn="auto" latinLnBrk="0" hangingPunct="0">
       <a:lnSpc>
         <a:spcPct val="90000"/>
       </a:lnSpc>
@@ -284,13 +285,13 @@
         </a:solidFill>
         <a:effectLst/>
         <a:uFillTx/>
-        <a:latin typeface="+mn-lt"/>
-        <a:ea typeface="+mn-ea"/>
-        <a:cs typeface="+mn-cs"/>
+        <a:latin typeface="+mj-lt"/>
+        <a:ea typeface="+mj-ea"/>
+        <a:cs typeface="+mj-cs"/>
         <a:sym typeface="Helvetica Neue"/>
       </a:defRPr>
     </a:lvl8pPr>
-    <a:lvl9pPr marL="0" marR="0" indent="3657600" algn="l" defTabSz="2438338" rtl="0" fontAlgn="auto" latinLnBrk="0" hangingPunct="0">
+    <a:lvl9pPr marL="0" marR="0" indent="0" algn="l" defTabSz="2438337" rtl="0" fontAlgn="auto" latinLnBrk="0" hangingPunct="0">
       <a:lnSpc>
         <a:spcPct val="90000"/>
       </a:lnSpc>
@@ -314,9 +315,9 @@
         </a:solidFill>
         <a:effectLst/>
         <a:uFillTx/>
-        <a:latin typeface="+mn-lt"/>
-        <a:ea typeface="+mn-ea"/>
-        <a:cs typeface="+mn-cs"/>
+        <a:latin typeface="+mj-lt"/>
+        <a:ea typeface="+mj-ea"/>
+        <a:cs typeface="+mj-cs"/>
         <a:sym typeface="Helvetica Neue"/>
       </a:defRPr>
     </a:lvl9pPr>
@@ -404,9 +405,9 @@
         <a:spcPct val="117999"/>
       </a:lnSpc>
       <a:defRPr sz="2200">
-        <a:latin typeface="+mn-lt"/>
-        <a:ea typeface="+mn-ea"/>
-        <a:cs typeface="+mn-cs"/>
+        <a:latin typeface="+mj-lt"/>
+        <a:ea typeface="+mj-ea"/>
+        <a:cs typeface="+mj-cs"/>
         <a:sym typeface="Helvetica Neue"/>
       </a:defRPr>
     </a:lvl1pPr>
@@ -415,9 +416,9 @@
         <a:spcPct val="117999"/>
       </a:lnSpc>
       <a:defRPr sz="2200">
-        <a:latin typeface="+mn-lt"/>
-        <a:ea typeface="+mn-ea"/>
-        <a:cs typeface="+mn-cs"/>
+        <a:latin typeface="+mj-lt"/>
+        <a:ea typeface="+mj-ea"/>
+        <a:cs typeface="+mj-cs"/>
         <a:sym typeface="Helvetica Neue"/>
       </a:defRPr>
     </a:lvl2pPr>
@@ -426,9 +427,9 @@
         <a:spcPct val="117999"/>
       </a:lnSpc>
       <a:defRPr sz="2200">
-        <a:latin typeface="+mn-lt"/>
-        <a:ea typeface="+mn-ea"/>
-        <a:cs typeface="+mn-cs"/>
+        <a:latin typeface="+mj-lt"/>
+        <a:ea typeface="+mj-ea"/>
+        <a:cs typeface="+mj-cs"/>
         <a:sym typeface="Helvetica Neue"/>
       </a:defRPr>
     </a:lvl3pPr>
@@ -437,9 +438,9 @@
         <a:spcPct val="117999"/>
       </a:lnSpc>
       <a:defRPr sz="2200">
-        <a:latin typeface="+mn-lt"/>
-        <a:ea typeface="+mn-ea"/>
-        <a:cs typeface="+mn-cs"/>
+        <a:latin typeface="+mj-lt"/>
+        <a:ea typeface="+mj-ea"/>
+        <a:cs typeface="+mj-cs"/>
         <a:sym typeface="Helvetica Neue"/>
       </a:defRPr>
     </a:lvl4pPr>
@@ -448,9 +449,9 @@
         <a:spcPct val="117999"/>
       </a:lnSpc>
       <a:defRPr sz="2200">
-        <a:latin typeface="+mn-lt"/>
-        <a:ea typeface="+mn-ea"/>
-        <a:cs typeface="+mn-cs"/>
+        <a:latin typeface="+mj-lt"/>
+        <a:ea typeface="+mj-ea"/>
+        <a:cs typeface="+mj-cs"/>
         <a:sym typeface="Helvetica Neue"/>
       </a:defRPr>
     </a:lvl5pPr>
@@ -459,9 +460,9 @@
         <a:spcPct val="117999"/>
       </a:lnSpc>
       <a:defRPr sz="2200">
-        <a:latin typeface="+mn-lt"/>
-        <a:ea typeface="+mn-ea"/>
-        <a:cs typeface="+mn-cs"/>
+        <a:latin typeface="+mj-lt"/>
+        <a:ea typeface="+mj-ea"/>
+        <a:cs typeface="+mj-cs"/>
         <a:sym typeface="Helvetica Neue"/>
       </a:defRPr>
     </a:lvl6pPr>
@@ -470,9 +471,9 @@
         <a:spcPct val="117999"/>
       </a:lnSpc>
       <a:defRPr sz="2200">
-        <a:latin typeface="+mn-lt"/>
-        <a:ea typeface="+mn-ea"/>
-        <a:cs typeface="+mn-cs"/>
+        <a:latin typeface="+mj-lt"/>
+        <a:ea typeface="+mj-ea"/>
+        <a:cs typeface="+mj-cs"/>
         <a:sym typeface="Helvetica Neue"/>
       </a:defRPr>
     </a:lvl7pPr>
@@ -481,9 +482,9 @@
         <a:spcPct val="117999"/>
       </a:lnSpc>
       <a:defRPr sz="2200">
-        <a:latin typeface="+mn-lt"/>
-        <a:ea typeface="+mn-ea"/>
-        <a:cs typeface="+mn-cs"/>
+        <a:latin typeface="+mj-lt"/>
+        <a:ea typeface="+mj-ea"/>
+        <a:cs typeface="+mj-cs"/>
         <a:sym typeface="Helvetica Neue"/>
       </a:defRPr>
     </a:lvl8pPr>
@@ -492,9 +493,9 @@
         <a:spcPct val="117999"/>
       </a:lnSpc>
       <a:defRPr sz="2200">
-        <a:latin typeface="+mn-lt"/>
-        <a:ea typeface="+mn-ea"/>
-        <a:cs typeface="+mn-cs"/>
+        <a:latin typeface="+mj-lt"/>
+        <a:ea typeface="+mj-ea"/>
+        <a:cs typeface="+mj-cs"/>
         <a:sym typeface="Helvetica Neue"/>
       </a:defRPr>
     </a:lvl9pPr>
@@ -503,7 +504,7 @@
 </file>
 
 <file path=ppt/slideLayouts/slideLayout1.xml><?xml version="1.0" encoding="utf-8"?>
-<p:sldLayout xmlns:a="http://schemas.openxmlformats.org/drawingml/2006/main" xmlns:r="http://schemas.openxmlformats.org/officeDocument/2006/relationships" xmlns:p="http://schemas.openxmlformats.org/presentationml/2006/main" xmlns:m="http://schemas.openxmlformats.org/officeDocument/2006/math" xmlns:a14="http://schemas.microsoft.com/office/drawing/2010/main" type="title" showMasterSp="1" showMasterPhAnim="1">
+<p:sldLayout xmlns:a="http://schemas.openxmlformats.org/drawingml/2006/main" xmlns:r="http://schemas.openxmlformats.org/officeDocument/2006/relationships" xmlns:p="http://schemas.openxmlformats.org/presentationml/2006/main" xmlns:m="http://schemas.openxmlformats.org/officeDocument/2006/math" xmlns:a14="http://schemas.microsoft.com/office/drawing/2010/main" type="tx" showMasterSp="1" showMasterPhAnim="1">
   <p:cSld name="Title">
     <p:spTree>
       <p:nvGrpSpPr>
@@ -521,23 +522,23 @@
       </p:grpSpPr>
       <p:sp>
         <p:nvSpPr>
-          <p:cNvPr id="11" name="Author and Date"/>
+          <p:cNvPr id="11" name="Body Level One…"/>
           <p:cNvSpPr txBox="1"/>
           <p:nvPr>
-            <p:ph type="body" sz="quarter" idx="21" hasCustomPrompt="1"/>
+            <p:ph type="body" sz="quarter" idx="1" hasCustomPrompt="1"/>
           </p:nvPr>
         </p:nvSpPr>
         <p:spPr>
           <a:xfrm>
             <a:off x="1201340" y="11859862"/>
-            <a:ext cx="21971003" cy="636979"/>
+            <a:ext cx="21971004" cy="636980"/>
           </a:xfrm>
           <a:prstGeom prst="rect">
             <a:avLst/>
           </a:prstGeom>
         </p:spPr>
         <p:txBody>
-          <a:bodyPr lIns="45719" tIns="45719" rIns="45719" bIns="45719"/>
+          <a:bodyPr lIns="45718" tIns="45718" rIns="45718" bIns="45718" numCol="1" spcCol="38100"/>
           <a:lstStyle>
             <a:lvl1pPr marL="0" indent="0" defTabSz="825500">
               <a:lnSpc>
@@ -550,11 +551,71 @@
               <a:buNone/>
               <a:defRPr b="1" sz="3600"/>
             </a:lvl1pPr>
+            <a:lvl2pPr marL="1066800" indent="-457200" defTabSz="825500">
+              <a:lnSpc>
+                <a:spcPct val="100000"/>
+              </a:lnSpc>
+              <a:spcBef>
+                <a:spcPts val="0"/>
+              </a:spcBef>
+              <a:defRPr b="1" sz="3600"/>
+            </a:lvl2pPr>
+            <a:lvl3pPr marL="1676400" indent="-457200" defTabSz="825500">
+              <a:lnSpc>
+                <a:spcPct val="100000"/>
+              </a:lnSpc>
+              <a:spcBef>
+                <a:spcPts val="0"/>
+              </a:spcBef>
+              <a:defRPr b="1" sz="3600"/>
+            </a:lvl3pPr>
+            <a:lvl4pPr marL="2286000" indent="-457200" defTabSz="825500">
+              <a:lnSpc>
+                <a:spcPct val="100000"/>
+              </a:lnSpc>
+              <a:spcBef>
+                <a:spcPts val="0"/>
+              </a:spcBef>
+              <a:defRPr b="1" sz="3600"/>
+            </a:lvl4pPr>
+            <a:lvl5pPr marL="2895600" indent="-457200" defTabSz="825500">
+              <a:lnSpc>
+                <a:spcPct val="100000"/>
+              </a:lnSpc>
+              <a:spcBef>
+                <a:spcPts val="0"/>
+              </a:spcBef>
+              <a:defRPr b="1" sz="3600"/>
+            </a:lvl5pPr>
           </a:lstStyle>
           <a:p>
             <a:pPr/>
             <a:r>
               <a:t>Author and Date</a:t>
+            </a:r>
+          </a:p>
+          <a:p>
+            <a:pPr lvl="1"/>
+            <a:r>
+              <a:t/>
+            </a:r>
+          </a:p>
+          <a:p>
+            <a:pPr lvl="2"/>
+            <a:r>
+              <a:t/>
+            </a:r>
+          </a:p>
+          <a:p>
+            <a:pPr lvl="3"/>
+            <a:r>
+              <a:t/>
+            </a:r>
+          </a:p>
+          <a:p>
+            <a:pPr lvl="4"/>
+            <a:r>
+              <a:t/>
             </a:r>
           </a:p>
         </p:txBody>
@@ -570,7 +631,7 @@
         <p:spPr>
           <a:xfrm>
             <a:off x="1206496" y="2574991"/>
-            <a:ext cx="21971004" cy="4648201"/>
+            <a:ext cx="21971005" cy="4648202"/>
           </a:xfrm>
           <a:prstGeom prst="rect">
             <a:avLst/>
@@ -596,20 +657,20 @@
           <p:cNvPr id="13" name="Body Level One…"/>
           <p:cNvSpPr txBox="1"/>
           <p:nvPr>
-            <p:ph type="body" sz="quarter" idx="1" hasCustomPrompt="1"/>
+            <p:ph type="body" sz="quarter" idx="21" hasCustomPrompt="1"/>
           </p:nvPr>
         </p:nvSpPr>
         <p:spPr>
           <a:xfrm>
             <a:off x="1201342" y="7223190"/>
-            <a:ext cx="21971001" cy="1905001"/>
+            <a:ext cx="21971002" cy="1905002"/>
           </a:xfrm>
           <a:prstGeom prst="rect">
             <a:avLst/>
           </a:prstGeom>
         </p:spPr>
         <p:txBody>
-          <a:bodyPr/>
+          <a:bodyPr numCol="1" spcCol="38100"/>
           <a:lstStyle>
             <a:lvl1pPr marL="0" indent="0" defTabSz="825500">
               <a:lnSpc>
@@ -622,79 +683,11 @@
               <a:buNone/>
               <a:defRPr b="1" sz="5500"/>
             </a:lvl1pPr>
-            <a:lvl2pPr marL="0" indent="457200" defTabSz="825500">
-              <a:lnSpc>
-                <a:spcPct val="100000"/>
-              </a:lnSpc>
-              <a:spcBef>
-                <a:spcPts val="0"/>
-              </a:spcBef>
-              <a:buSzTx/>
-              <a:buNone/>
-              <a:defRPr b="1" sz="5500"/>
-            </a:lvl2pPr>
-            <a:lvl3pPr marL="0" indent="914400" defTabSz="825500">
-              <a:lnSpc>
-                <a:spcPct val="100000"/>
-              </a:lnSpc>
-              <a:spcBef>
-                <a:spcPts val="0"/>
-              </a:spcBef>
-              <a:buSzTx/>
-              <a:buNone/>
-              <a:defRPr b="1" sz="5500"/>
-            </a:lvl3pPr>
-            <a:lvl4pPr marL="0" indent="1371600" defTabSz="825500">
-              <a:lnSpc>
-                <a:spcPct val="100000"/>
-              </a:lnSpc>
-              <a:spcBef>
-                <a:spcPts val="0"/>
-              </a:spcBef>
-              <a:buSzTx/>
-              <a:buNone/>
-              <a:defRPr b="1" sz="5500"/>
-            </a:lvl4pPr>
-            <a:lvl5pPr marL="0" indent="1828800" defTabSz="825500">
-              <a:lnSpc>
-                <a:spcPct val="100000"/>
-              </a:lnSpc>
-              <a:spcBef>
-                <a:spcPts val="0"/>
-              </a:spcBef>
-              <a:buSzTx/>
-              <a:buNone/>
-              <a:defRPr b="1" sz="5500"/>
-            </a:lvl5pPr>
           </a:lstStyle>
           <a:p>
             <a:pPr/>
             <a:r>
               <a:t>Presentation Subtitle</a:t>
-            </a:r>
-          </a:p>
-          <a:p>
-            <a:pPr lvl="1"/>
-            <a:r>
-              <a:t/>
-            </a:r>
-          </a:p>
-          <a:p>
-            <a:pPr lvl="2"/>
-            <a:r>
-              <a:t/>
-            </a:r>
-          </a:p>
-          <a:p>
-            <a:pPr lvl="3"/>
-            <a:r>
-              <a:t/>
-            </a:r>
-          </a:p>
-          <a:p>
-            <a:pPr lvl="4"/>
-            <a:r>
-              <a:t/>
             </a:r>
           </a:p>
         </p:txBody>
@@ -758,7 +751,7 @@
         <p:spPr>
           <a:xfrm>
             <a:off x="1206500" y="1079500"/>
-            <a:ext cx="21971000" cy="1434949"/>
+            <a:ext cx="21971000" cy="1434950"/>
           </a:xfrm>
           <a:prstGeom prst="rect">
             <a:avLst/>
@@ -777,23 +770,23 @@
       </p:sp>
       <p:sp>
         <p:nvSpPr>
-          <p:cNvPr id="100" name="Slide Subtitle"/>
+          <p:cNvPr id="100" name="Body Level One…"/>
           <p:cNvSpPr txBox="1"/>
           <p:nvPr>
-            <p:ph type="body" sz="quarter" idx="21" hasCustomPrompt="1"/>
+            <p:ph type="body" sz="quarter" idx="1" hasCustomPrompt="1"/>
           </p:nvPr>
         </p:nvSpPr>
         <p:spPr>
           <a:xfrm>
-            <a:off x="1206500" y="2372962"/>
-            <a:ext cx="21971000" cy="934780"/>
+            <a:off x="1206500" y="2372961"/>
+            <a:ext cx="21971000" cy="934781"/>
           </a:xfrm>
           <a:prstGeom prst="rect">
             <a:avLst/>
           </a:prstGeom>
         </p:spPr>
         <p:txBody>
-          <a:bodyPr lIns="45719" tIns="45719" rIns="45719" bIns="45719"/>
+          <a:bodyPr lIns="45718" tIns="45718" rIns="45718" bIns="45718" numCol="1" spcCol="38100"/>
           <a:lstStyle>
             <a:lvl1pPr marL="0" indent="0" defTabSz="825500">
               <a:lnSpc>
@@ -806,11 +799,71 @@
               <a:buNone/>
               <a:defRPr b="1" sz="5500"/>
             </a:lvl1pPr>
+            <a:lvl2pPr marL="1308100" indent="-698500" defTabSz="825500">
+              <a:lnSpc>
+                <a:spcPct val="100000"/>
+              </a:lnSpc>
+              <a:spcBef>
+                <a:spcPts val="0"/>
+              </a:spcBef>
+              <a:defRPr b="1" sz="5500"/>
+            </a:lvl2pPr>
+            <a:lvl3pPr marL="1917700" indent="-698500" defTabSz="825500">
+              <a:lnSpc>
+                <a:spcPct val="100000"/>
+              </a:lnSpc>
+              <a:spcBef>
+                <a:spcPts val="0"/>
+              </a:spcBef>
+              <a:defRPr b="1" sz="5500"/>
+            </a:lvl3pPr>
+            <a:lvl4pPr marL="2527300" indent="-698500" defTabSz="825500">
+              <a:lnSpc>
+                <a:spcPct val="100000"/>
+              </a:lnSpc>
+              <a:spcBef>
+                <a:spcPts val="0"/>
+              </a:spcBef>
+              <a:defRPr b="1" sz="5500"/>
+            </a:lvl4pPr>
+            <a:lvl5pPr marL="3136900" indent="-698500" defTabSz="825500">
+              <a:lnSpc>
+                <a:spcPct val="100000"/>
+              </a:lnSpc>
+              <a:spcBef>
+                <a:spcPts val="0"/>
+              </a:spcBef>
+              <a:defRPr b="1" sz="5500"/>
+            </a:lvl5pPr>
           </a:lstStyle>
           <a:p>
             <a:pPr/>
             <a:r>
               <a:t>Slide Subtitle</a:t>
+            </a:r>
+          </a:p>
+          <a:p>
+            <a:pPr lvl="1"/>
+            <a:r>
+              <a:t/>
+            </a:r>
+          </a:p>
+          <a:p>
+            <a:pPr lvl="2"/>
+            <a:r>
+              <a:t/>
+            </a:r>
+          </a:p>
+          <a:p>
+            <a:pPr lvl="3"/>
+            <a:r>
+              <a:t/>
+            </a:r>
+          </a:p>
+          <a:p>
+            <a:pPr lvl="4"/>
+            <a:r>
+              <a:t/>
             </a:r>
           </a:p>
         </p:txBody>
@@ -893,23 +946,23 @@
       </p:sp>
       <p:sp>
         <p:nvSpPr>
-          <p:cNvPr id="109" name="Agenda Subtitle"/>
+          <p:cNvPr id="109" name="Body Level One…"/>
           <p:cNvSpPr txBox="1"/>
           <p:nvPr>
-            <p:ph type="body" sz="quarter" idx="21" hasCustomPrompt="1"/>
+            <p:ph type="body" sz="quarter" idx="1" hasCustomPrompt="1"/>
           </p:nvPr>
         </p:nvSpPr>
         <p:spPr>
           <a:xfrm>
-            <a:off x="1206500" y="2372962"/>
-            <a:ext cx="21971000" cy="934780"/>
+            <a:off x="1206500" y="2372961"/>
+            <a:ext cx="21971000" cy="934781"/>
           </a:xfrm>
           <a:prstGeom prst="rect">
             <a:avLst/>
           </a:prstGeom>
         </p:spPr>
         <p:txBody>
-          <a:bodyPr lIns="45719" tIns="45719" rIns="45719" bIns="45719"/>
+          <a:bodyPr lIns="45718" tIns="45718" rIns="45718" bIns="45718" numCol="1" spcCol="38100"/>
           <a:lstStyle>
             <a:lvl1pPr marL="0" indent="0" defTabSz="825500">
               <a:lnSpc>
@@ -922,11 +975,71 @@
               <a:buNone/>
               <a:defRPr b="1" sz="5500"/>
             </a:lvl1pPr>
+            <a:lvl2pPr marL="1308100" indent="-698500" defTabSz="825500">
+              <a:lnSpc>
+                <a:spcPct val="100000"/>
+              </a:lnSpc>
+              <a:spcBef>
+                <a:spcPts val="0"/>
+              </a:spcBef>
+              <a:defRPr b="1" sz="5500"/>
+            </a:lvl2pPr>
+            <a:lvl3pPr marL="1917700" indent="-698500" defTabSz="825500">
+              <a:lnSpc>
+                <a:spcPct val="100000"/>
+              </a:lnSpc>
+              <a:spcBef>
+                <a:spcPts val="0"/>
+              </a:spcBef>
+              <a:defRPr b="1" sz="5500"/>
+            </a:lvl3pPr>
+            <a:lvl4pPr marL="2527300" indent="-698500" defTabSz="825500">
+              <a:lnSpc>
+                <a:spcPct val="100000"/>
+              </a:lnSpc>
+              <a:spcBef>
+                <a:spcPts val="0"/>
+              </a:spcBef>
+              <a:defRPr b="1" sz="5500"/>
+            </a:lvl4pPr>
+            <a:lvl5pPr marL="3136900" indent="-698500" defTabSz="825500">
+              <a:lnSpc>
+                <a:spcPct val="100000"/>
+              </a:lnSpc>
+              <a:spcBef>
+                <a:spcPts val="0"/>
+              </a:spcBef>
+              <a:defRPr b="1" sz="5500"/>
+            </a:lvl5pPr>
           </a:lstStyle>
           <a:p>
             <a:pPr/>
             <a:r>
               <a:t>Agenda Subtitle</a:t>
+            </a:r>
+          </a:p>
+          <a:p>
+            <a:pPr lvl="1"/>
+            <a:r>
+              <a:t/>
+            </a:r>
+          </a:p>
+          <a:p>
+            <a:pPr lvl="2"/>
+            <a:r>
+              <a:t/>
+            </a:r>
+          </a:p>
+          <a:p>
+            <a:pPr lvl="3"/>
+            <a:r>
+              <a:t/>
+            </a:r>
+          </a:p>
+          <a:p>
+            <a:pPr lvl="4"/>
+            <a:r>
+              <a:t/>
             </a:r>
           </a:p>
         </p:txBody>
@@ -936,16 +1049,20 @@
           <p:cNvPr id="110" name="Body Level One…"/>
           <p:cNvSpPr txBox="1"/>
           <p:nvPr>
-            <p:ph type="body" idx="1" hasCustomPrompt="1"/>
-          </p:nvPr>
-        </p:nvSpPr>
-        <p:spPr>
-          <a:prstGeom prst="rect">
-            <a:avLst/>
-          </a:prstGeom>
-        </p:spPr>
-        <p:txBody>
-          <a:bodyPr/>
+            <p:ph type="body" idx="21" hasCustomPrompt="1"/>
+          </p:nvPr>
+        </p:nvSpPr>
+        <p:spPr>
+          <a:xfrm>
+            <a:off x="1206500" y="4248503"/>
+            <a:ext cx="21971000" cy="8256014"/>
+          </a:xfrm>
+          <a:prstGeom prst="rect">
+            <a:avLst/>
+          </a:prstGeom>
+        </p:spPr>
+        <p:txBody>
+          <a:bodyPr numCol="1" spcCol="38100"/>
           <a:lstStyle>
             <a:lvl1pPr marL="0" indent="0" defTabSz="825500">
               <a:lnSpc>
@@ -956,81 +1073,13 @@
               </a:spcBef>
               <a:buSzTx/>
               <a:buNone/>
-              <a:defRPr spc="-55" sz="5500"/>
+              <a:defRPr spc="-99" sz="5500"/>
             </a:lvl1pPr>
-            <a:lvl2pPr marL="0" indent="457200" defTabSz="825500">
-              <a:lnSpc>
-                <a:spcPct val="100000"/>
-              </a:lnSpc>
-              <a:spcBef>
-                <a:spcPts val="1800"/>
-              </a:spcBef>
-              <a:buSzTx/>
-              <a:buNone/>
-              <a:defRPr spc="-55" sz="5500"/>
-            </a:lvl2pPr>
-            <a:lvl3pPr marL="0" indent="914400" defTabSz="825500">
-              <a:lnSpc>
-                <a:spcPct val="100000"/>
-              </a:lnSpc>
-              <a:spcBef>
-                <a:spcPts val="1800"/>
-              </a:spcBef>
-              <a:buSzTx/>
-              <a:buNone/>
-              <a:defRPr spc="-55" sz="5500"/>
-            </a:lvl3pPr>
-            <a:lvl4pPr marL="0" indent="1371600" defTabSz="825500">
-              <a:lnSpc>
-                <a:spcPct val="100000"/>
-              </a:lnSpc>
-              <a:spcBef>
-                <a:spcPts val="1800"/>
-              </a:spcBef>
-              <a:buSzTx/>
-              <a:buNone/>
-              <a:defRPr spc="-55" sz="5500"/>
-            </a:lvl4pPr>
-            <a:lvl5pPr marL="0" indent="1828800" defTabSz="825500">
-              <a:lnSpc>
-                <a:spcPct val="100000"/>
-              </a:lnSpc>
-              <a:spcBef>
-                <a:spcPts val="1800"/>
-              </a:spcBef>
-              <a:buSzTx/>
-              <a:buNone/>
-              <a:defRPr spc="-55" sz="5500"/>
-            </a:lvl5pPr>
           </a:lstStyle>
           <a:p>
             <a:pPr/>
             <a:r>
               <a:t>Agenda Topics</a:t>
-            </a:r>
-          </a:p>
-          <a:p>
-            <a:pPr lvl="1"/>
-            <a:r>
-              <a:t/>
-            </a:r>
-          </a:p>
-          <a:p>
-            <a:pPr lvl="2"/>
-            <a:r>
-              <a:t/>
-            </a:r>
-          </a:p>
-          <a:p>
-            <a:pPr lvl="3"/>
-            <a:r>
-              <a:t/>
-            </a:r>
-          </a:p>
-          <a:p>
-            <a:pPr lvl="4"/>
-            <a:r>
-              <a:t/>
             </a:r>
           </a:p>
         </p:txBody>
@@ -1101,7 +1150,7 @@
           </a:prstGeom>
         </p:spPr>
         <p:txBody>
-          <a:bodyPr anchor="ctr"/>
+          <a:bodyPr numCol="1" spcCol="38100" anchor="ctr"/>
           <a:lstStyle>
             <a:lvl1pPr marL="0" indent="0" algn="ctr">
               <a:lnSpc>
@@ -1119,7 +1168,7 @@
                 <a:sym typeface="Helvetica Neue Medium"/>
               </a:defRPr>
             </a:lvl1pPr>
-            <a:lvl2pPr marL="0" indent="457200" algn="ctr">
+            <a:lvl2pPr marL="0" indent="0" algn="ctr">
               <a:lnSpc>
                 <a:spcPct val="80000"/>
               </a:lnSpc>
@@ -1135,7 +1184,7 @@
                 <a:sym typeface="Helvetica Neue Medium"/>
               </a:defRPr>
             </a:lvl2pPr>
-            <a:lvl3pPr marL="0" indent="914400" algn="ctr">
+            <a:lvl3pPr marL="0" indent="0" algn="ctr">
               <a:lnSpc>
                 <a:spcPct val="80000"/>
               </a:lnSpc>
@@ -1151,7 +1200,7 @@
                 <a:sym typeface="Helvetica Neue Medium"/>
               </a:defRPr>
             </a:lvl3pPr>
-            <a:lvl4pPr marL="0" indent="1371600" algn="ctr">
+            <a:lvl4pPr marL="0" indent="0" algn="ctr">
               <a:lnSpc>
                 <a:spcPct val="80000"/>
               </a:lnSpc>
@@ -1167,7 +1216,7 @@
                 <a:sym typeface="Helvetica Neue Medium"/>
               </a:defRPr>
             </a:lvl4pPr>
-            <a:lvl5pPr marL="0" indent="1828800" algn="ctr">
+            <a:lvl5pPr marL="0" indent="0" algn="ctr">
               <a:lnSpc>
                 <a:spcPct val="80000"/>
               </a:lnSpc>
@@ -1274,15 +1323,15 @@
         </p:nvSpPr>
         <p:spPr>
           <a:xfrm>
-            <a:off x="1206500" y="1075927"/>
-            <a:ext cx="21971000" cy="7241584"/>
+            <a:off x="1206500" y="1075926"/>
+            <a:ext cx="21971000" cy="7241586"/>
           </a:xfrm>
           <a:prstGeom prst="rect">
             <a:avLst/>
           </a:prstGeom>
         </p:spPr>
         <p:txBody>
-          <a:bodyPr anchor="b"/>
+          <a:bodyPr numCol="1" spcCol="38100" anchor="b"/>
           <a:lstStyle>
             <a:lvl1pPr marL="0" indent="0" algn="ctr">
               <a:lnSpc>
@@ -1295,7 +1344,7 @@
               <a:buNone/>
               <a:defRPr b="1" spc="-250" sz="25000"/>
             </a:lvl1pPr>
-            <a:lvl2pPr marL="0" indent="457200" algn="ctr">
+            <a:lvl2pPr marL="0" indent="0" algn="ctr">
               <a:lnSpc>
                 <a:spcPct val="80000"/>
               </a:lnSpc>
@@ -1306,7 +1355,7 @@
               <a:buNone/>
               <a:defRPr b="1" spc="-250" sz="25000"/>
             </a:lvl2pPr>
-            <a:lvl3pPr marL="0" indent="914400" algn="ctr">
+            <a:lvl3pPr marL="0" indent="0" algn="ctr">
               <a:lnSpc>
                 <a:spcPct val="80000"/>
               </a:lnSpc>
@@ -1317,7 +1366,7 @@
               <a:buNone/>
               <a:defRPr b="1" spc="-250" sz="25000"/>
             </a:lvl3pPr>
-            <a:lvl4pPr marL="0" indent="1371600" algn="ctr">
+            <a:lvl4pPr marL="0" indent="0" algn="ctr">
               <a:lnSpc>
                 <a:spcPct val="80000"/>
               </a:lnSpc>
@@ -1328,7 +1377,7 @@
               <a:buNone/>
               <a:defRPr b="1" spc="-250" sz="25000"/>
             </a:lvl4pPr>
-            <a:lvl5pPr marL="0" indent="1828800" algn="ctr">
+            <a:lvl5pPr marL="0" indent="0" algn="ctr">
               <a:lnSpc>
                 <a:spcPct val="80000"/>
               </a:lnSpc>
@@ -1390,7 +1439,7 @@
           </a:prstGeom>
         </p:spPr>
         <p:txBody>
-          <a:bodyPr lIns="45719" tIns="45719" rIns="45719" bIns="45719"/>
+          <a:bodyPr lIns="45718" tIns="45718" rIns="45718" bIns="45718" numCol="1" spcCol="38100"/>
           <a:lstStyle>
             <a:lvl1pPr marL="0" indent="0" algn="ctr" defTabSz="825500">
               <a:lnSpc>
@@ -1462,23 +1511,23 @@
       </p:grpSpPr>
       <p:sp>
         <p:nvSpPr>
-          <p:cNvPr id="135" name="Attribution"/>
+          <p:cNvPr id="135" name="Body Level One…"/>
           <p:cNvSpPr txBox="1"/>
           <p:nvPr>
-            <p:ph type="body" sz="quarter" idx="21" hasCustomPrompt="1"/>
+            <p:ph type="body" sz="quarter" idx="1" hasCustomPrompt="1"/>
           </p:nvPr>
         </p:nvSpPr>
         <p:spPr>
           <a:xfrm>
-            <a:off x="2430025" y="10675453"/>
-            <a:ext cx="20200052" cy="636979"/>
+            <a:off x="2430024" y="10675453"/>
+            <a:ext cx="20200054" cy="636980"/>
           </a:xfrm>
           <a:prstGeom prst="rect">
             <a:avLst/>
           </a:prstGeom>
         </p:spPr>
         <p:txBody>
-          <a:bodyPr lIns="45719" tIns="45719" rIns="45719" bIns="45719"/>
+          <a:bodyPr lIns="45718" tIns="45718" rIns="45718" bIns="45718" numCol="1" spcCol="38100"/>
           <a:lstStyle>
             <a:lvl1pPr marL="0" indent="0" defTabSz="825500">
               <a:lnSpc>
@@ -1491,11 +1540,71 @@
               <a:buNone/>
               <a:defRPr b="1" sz="3600"/>
             </a:lvl1pPr>
+            <a:lvl2pPr marL="1066800" indent="-457200" defTabSz="825500">
+              <a:lnSpc>
+                <a:spcPct val="100000"/>
+              </a:lnSpc>
+              <a:spcBef>
+                <a:spcPts val="0"/>
+              </a:spcBef>
+              <a:defRPr b="1" sz="3600"/>
+            </a:lvl2pPr>
+            <a:lvl3pPr marL="1676400" indent="-457200" defTabSz="825500">
+              <a:lnSpc>
+                <a:spcPct val="100000"/>
+              </a:lnSpc>
+              <a:spcBef>
+                <a:spcPts val="0"/>
+              </a:spcBef>
+              <a:defRPr b="1" sz="3600"/>
+            </a:lvl3pPr>
+            <a:lvl4pPr marL="2286000" indent="-457200" defTabSz="825500">
+              <a:lnSpc>
+                <a:spcPct val="100000"/>
+              </a:lnSpc>
+              <a:spcBef>
+                <a:spcPts val="0"/>
+              </a:spcBef>
+              <a:defRPr b="1" sz="3600"/>
+            </a:lvl4pPr>
+            <a:lvl5pPr marL="2895600" indent="-457200" defTabSz="825500">
+              <a:lnSpc>
+                <a:spcPct val="100000"/>
+              </a:lnSpc>
+              <a:spcBef>
+                <a:spcPts val="0"/>
+              </a:spcBef>
+              <a:defRPr b="1" sz="3600"/>
+            </a:lvl5pPr>
           </a:lstStyle>
           <a:p>
             <a:pPr/>
             <a:r>
               <a:t>Attribution</a:t>
+            </a:r>
+          </a:p>
+          <a:p>
+            <a:pPr lvl="1"/>
+            <a:r>
+              <a:t/>
+            </a:r>
+          </a:p>
+          <a:p>
+            <a:pPr lvl="2"/>
+            <a:r>
+              <a:t/>
+            </a:r>
+          </a:p>
+          <a:p>
+            <a:pPr lvl="3"/>
+            <a:r>
+              <a:t/>
+            </a:r>
+          </a:p>
+          <a:p>
+            <a:pPr lvl="4"/>
+            <a:r>
+              <a:t/>
             </a:r>
           </a:p>
         </p:txBody>
@@ -1505,115 +1614,39 @@
           <p:cNvPr id="136" name="Body Level One…"/>
           <p:cNvSpPr txBox="1"/>
           <p:nvPr>
-            <p:ph type="body" sz="half" idx="1" hasCustomPrompt="1"/>
+            <p:ph type="body" sz="half" idx="21" hasCustomPrompt="1"/>
           </p:nvPr>
         </p:nvSpPr>
         <p:spPr>
           <a:xfrm>
             <a:off x="1753923" y="4939860"/>
-            <a:ext cx="20876154" cy="3836280"/>
+            <a:ext cx="20876154" cy="3836281"/>
           </a:xfrm>
           <a:prstGeom prst="rect">
             <a:avLst/>
           </a:prstGeom>
         </p:spPr>
         <p:txBody>
-          <a:bodyPr/>
+          <a:bodyPr numCol="1" spcCol="38100"/>
           <a:lstStyle>
-            <a:lvl1pPr marL="638923" indent="-469900">
+            <a:lvl1pPr marL="469900" indent="-300876">
               <a:spcBef>
                 <a:spcPts val="0"/>
               </a:spcBef>
               <a:buSzTx/>
               <a:buNone/>
-              <a:defRPr spc="-170" sz="8500">
+              <a:defRPr spc="-200" sz="8500">
                 <a:latin typeface="Helvetica Neue Medium"/>
                 <a:ea typeface="Helvetica Neue Medium"/>
                 <a:cs typeface="Helvetica Neue Medium"/>
                 <a:sym typeface="Helvetica Neue Medium"/>
               </a:defRPr>
             </a:lvl1pPr>
-            <a:lvl2pPr marL="638923" indent="-12700">
-              <a:spcBef>
-                <a:spcPts val="0"/>
-              </a:spcBef>
-              <a:buSzTx/>
-              <a:buNone/>
-              <a:defRPr spc="-170" sz="8500">
-                <a:latin typeface="Helvetica Neue Medium"/>
-                <a:ea typeface="Helvetica Neue Medium"/>
-                <a:cs typeface="Helvetica Neue Medium"/>
-                <a:sym typeface="Helvetica Neue Medium"/>
-              </a:defRPr>
-            </a:lvl2pPr>
-            <a:lvl3pPr marL="638923" indent="444500">
-              <a:spcBef>
-                <a:spcPts val="0"/>
-              </a:spcBef>
-              <a:buSzTx/>
-              <a:buNone/>
-              <a:defRPr spc="-170" sz="8500">
-                <a:latin typeface="Helvetica Neue Medium"/>
-                <a:ea typeface="Helvetica Neue Medium"/>
-                <a:cs typeface="Helvetica Neue Medium"/>
-                <a:sym typeface="Helvetica Neue Medium"/>
-              </a:defRPr>
-            </a:lvl3pPr>
-            <a:lvl4pPr marL="638923" indent="901700">
-              <a:spcBef>
-                <a:spcPts val="0"/>
-              </a:spcBef>
-              <a:buSzTx/>
-              <a:buNone/>
-              <a:defRPr spc="-170" sz="8500">
-                <a:latin typeface="Helvetica Neue Medium"/>
-                <a:ea typeface="Helvetica Neue Medium"/>
-                <a:cs typeface="Helvetica Neue Medium"/>
-                <a:sym typeface="Helvetica Neue Medium"/>
-              </a:defRPr>
-            </a:lvl4pPr>
-            <a:lvl5pPr marL="638923" indent="1358900">
-              <a:spcBef>
-                <a:spcPts val="0"/>
-              </a:spcBef>
-              <a:buSzTx/>
-              <a:buNone/>
-              <a:defRPr spc="-170" sz="8500">
-                <a:latin typeface="Helvetica Neue Medium"/>
-                <a:ea typeface="Helvetica Neue Medium"/>
-                <a:cs typeface="Helvetica Neue Medium"/>
-                <a:sym typeface="Helvetica Neue Medium"/>
-              </a:defRPr>
-            </a:lvl5pPr>
           </a:lstStyle>
           <a:p>
             <a:pPr/>
             <a:r>
               <a:t>“Notable Quote”</a:t>
-            </a:r>
-          </a:p>
-          <a:p>
-            <a:pPr lvl="1"/>
-            <a:r>
-              <a:t/>
-            </a:r>
-          </a:p>
-          <a:p>
-            <a:pPr lvl="2"/>
-            <a:r>
-              <a:t/>
-            </a:r>
-          </a:p>
-          <a:p>
-            <a:pPr lvl="3"/>
-            <a:r>
-              <a:t/>
-            </a:r>
-          </a:p>
-          <a:p>
-            <a:pPr lvl="4"/>
-            <a:r>
-              <a:t/>
             </a:r>
           </a:p>
         </p:txBody>
@@ -1684,7 +1717,7 @@
           </a:prstGeom>
         </p:spPr>
         <p:txBody>
-          <a:bodyPr lIns="91439" tIns="45719" rIns="91439" bIns="45719">
+          <a:bodyPr lIns="91439" tIns="45719" rIns="91439" bIns="45719" numCol="1" spcCol="38100">
             <a:noAutofit/>
           </a:bodyPr>
           <a:lstStyle/>
@@ -1711,7 +1744,7 @@
           </a:prstGeom>
         </p:spPr>
         <p:txBody>
-          <a:bodyPr lIns="91439" tIns="45719" rIns="91439" bIns="45719">
+          <a:bodyPr lIns="91439" tIns="45719" rIns="91439" bIns="45719" numCol="1" spcCol="38100">
             <a:noAutofit/>
           </a:bodyPr>
           <a:lstStyle/>
@@ -1730,15 +1763,15 @@
         </p:nvSpPr>
         <p:spPr>
           <a:xfrm>
-            <a:off x="-124635" y="1270000"/>
-            <a:ext cx="16840169" cy="11243712"/>
+            <a:off x="-124636" y="1270000"/>
+            <a:ext cx="16840170" cy="11243713"/>
           </a:xfrm>
           <a:prstGeom prst="rect">
             <a:avLst/>
           </a:prstGeom>
         </p:spPr>
         <p:txBody>
-          <a:bodyPr lIns="91439" tIns="45719" rIns="91439" bIns="45719">
+          <a:bodyPr lIns="91439" tIns="45719" rIns="91439" bIns="45719" numCol="1" spcCol="38100">
             <a:noAutofit/>
           </a:bodyPr>
           <a:lstStyle/>
@@ -1820,7 +1853,7 @@
           </a:prstGeom>
         </p:spPr>
         <p:txBody>
-          <a:bodyPr lIns="91439" tIns="45719" rIns="91439" bIns="45719">
+          <a:bodyPr lIns="91439" tIns="45719" rIns="91439" bIns="45719" numCol="1" spcCol="38100">
             <a:noAutofit/>
           </a:bodyPr>
           <a:lstStyle/>
@@ -1958,7 +1991,7 @@
           </a:prstGeom>
         </p:spPr>
         <p:txBody>
-          <a:bodyPr lIns="91439" tIns="45719" rIns="91439" bIns="45719">
+          <a:bodyPr lIns="91439" tIns="45719" rIns="91439" bIns="45719" numCol="1" spcCol="38100">
             <a:noAutofit/>
           </a:bodyPr>
           <a:lstStyle/>
@@ -2001,23 +2034,23 @@
       </p:sp>
       <p:sp>
         <p:nvSpPr>
-          <p:cNvPr id="23" name="Author and Date"/>
+          <p:cNvPr id="23" name="Body Level One…"/>
           <p:cNvSpPr txBox="1"/>
           <p:nvPr>
-            <p:ph type="body" sz="quarter" idx="22" hasCustomPrompt="1"/>
+            <p:ph type="body" sz="quarter" idx="1" hasCustomPrompt="1"/>
           </p:nvPr>
         </p:nvSpPr>
         <p:spPr>
           <a:xfrm>
             <a:off x="1207690" y="1106137"/>
-            <a:ext cx="21968621" cy="636979"/>
+            <a:ext cx="21968621" cy="636980"/>
           </a:xfrm>
           <a:prstGeom prst="rect">
             <a:avLst/>
           </a:prstGeom>
         </p:spPr>
         <p:txBody>
-          <a:bodyPr lIns="45719" tIns="45719" rIns="45719" bIns="45719"/>
+          <a:bodyPr lIns="45718" tIns="45718" rIns="45718" bIns="45718" numCol="1" spcCol="38100"/>
           <a:lstStyle>
             <a:lvl1pPr marL="0" indent="0" defTabSz="825500">
               <a:lnSpc>
@@ -2030,11 +2063,71 @@
               <a:buNone/>
               <a:defRPr b="1" sz="3600"/>
             </a:lvl1pPr>
+            <a:lvl2pPr marL="1066800" indent="-457200" defTabSz="825500">
+              <a:lnSpc>
+                <a:spcPct val="100000"/>
+              </a:lnSpc>
+              <a:spcBef>
+                <a:spcPts val="0"/>
+              </a:spcBef>
+              <a:defRPr b="1" sz="3600"/>
+            </a:lvl2pPr>
+            <a:lvl3pPr marL="1676400" indent="-457200" defTabSz="825500">
+              <a:lnSpc>
+                <a:spcPct val="100000"/>
+              </a:lnSpc>
+              <a:spcBef>
+                <a:spcPts val="0"/>
+              </a:spcBef>
+              <a:defRPr b="1" sz="3600"/>
+            </a:lvl3pPr>
+            <a:lvl4pPr marL="2286000" indent="-457200" defTabSz="825500">
+              <a:lnSpc>
+                <a:spcPct val="100000"/>
+              </a:lnSpc>
+              <a:spcBef>
+                <a:spcPts val="0"/>
+              </a:spcBef>
+              <a:defRPr b="1" sz="3600"/>
+            </a:lvl4pPr>
+            <a:lvl5pPr marL="2895600" indent="-457200" defTabSz="825500">
+              <a:lnSpc>
+                <a:spcPct val="100000"/>
+              </a:lnSpc>
+              <a:spcBef>
+                <a:spcPts val="0"/>
+              </a:spcBef>
+              <a:defRPr b="1" sz="3600"/>
+            </a:lvl5pPr>
           </a:lstStyle>
           <a:p>
             <a:pPr/>
             <a:r>
               <a:t>Author and Date</a:t>
+            </a:r>
+          </a:p>
+          <a:p>
+            <a:pPr lvl="1"/>
+            <a:r>
+              <a:t/>
+            </a:r>
+          </a:p>
+          <a:p>
+            <a:pPr lvl="2"/>
+            <a:r>
+              <a:t/>
+            </a:r>
+          </a:p>
+          <a:p>
+            <a:pPr lvl="3"/>
+            <a:r>
+              <a:t/>
+            </a:r>
+          </a:p>
+          <a:p>
+            <a:pPr lvl="4"/>
+            <a:r>
+              <a:t/>
             </a:r>
           </a:p>
         </p:txBody>
@@ -2044,20 +2137,20 @@
           <p:cNvPr id="24" name="Body Level One…"/>
           <p:cNvSpPr txBox="1"/>
           <p:nvPr>
-            <p:ph type="body" sz="quarter" idx="1" hasCustomPrompt="1"/>
+            <p:ph type="body" sz="quarter" idx="22" hasCustomPrompt="1"/>
           </p:nvPr>
         </p:nvSpPr>
         <p:spPr>
           <a:xfrm>
-            <a:off x="1206500" y="11609910"/>
-            <a:ext cx="21971000" cy="1116952"/>
+            <a:off x="1206500" y="11609909"/>
+            <a:ext cx="21971000" cy="1116953"/>
           </a:xfrm>
           <a:prstGeom prst="rect">
             <a:avLst/>
           </a:prstGeom>
         </p:spPr>
         <p:txBody>
-          <a:bodyPr/>
+          <a:bodyPr numCol="1" spcCol="38100"/>
           <a:lstStyle>
             <a:lvl1pPr marL="0" indent="0" defTabSz="825500">
               <a:lnSpc>
@@ -2070,79 +2163,11 @@
               <a:buNone/>
               <a:defRPr b="1" sz="5500"/>
             </a:lvl1pPr>
-            <a:lvl2pPr marL="0" indent="457200" defTabSz="825500">
-              <a:lnSpc>
-                <a:spcPct val="100000"/>
-              </a:lnSpc>
-              <a:spcBef>
-                <a:spcPts val="0"/>
-              </a:spcBef>
-              <a:buSzTx/>
-              <a:buNone/>
-              <a:defRPr b="1" sz="5500"/>
-            </a:lvl2pPr>
-            <a:lvl3pPr marL="0" indent="914400" defTabSz="825500">
-              <a:lnSpc>
-                <a:spcPct val="100000"/>
-              </a:lnSpc>
-              <a:spcBef>
-                <a:spcPts val="0"/>
-              </a:spcBef>
-              <a:buSzTx/>
-              <a:buNone/>
-              <a:defRPr b="1" sz="5500"/>
-            </a:lvl3pPr>
-            <a:lvl4pPr marL="0" indent="1371600" defTabSz="825500">
-              <a:lnSpc>
-                <a:spcPct val="100000"/>
-              </a:lnSpc>
-              <a:spcBef>
-                <a:spcPts val="0"/>
-              </a:spcBef>
-              <a:buSzTx/>
-              <a:buNone/>
-              <a:defRPr b="1" sz="5500"/>
-            </a:lvl4pPr>
-            <a:lvl5pPr marL="0" indent="1828800" defTabSz="825500">
-              <a:lnSpc>
-                <a:spcPct val="100000"/>
-              </a:lnSpc>
-              <a:spcBef>
-                <a:spcPts val="0"/>
-              </a:spcBef>
-              <a:buSzTx/>
-              <a:buNone/>
-              <a:defRPr b="1" sz="5500"/>
-            </a:lvl5pPr>
           </a:lstStyle>
           <a:p>
             <a:pPr/>
             <a:r>
               <a:t>Presentation Subtitle</a:t>
-            </a:r>
-          </a:p>
-          <a:p>
-            <a:pPr lvl="1"/>
-            <a:r>
-              <a:t/>
-            </a:r>
-          </a:p>
-          <a:p>
-            <a:pPr lvl="2"/>
-            <a:r>
-              <a:t/>
-            </a:r>
-          </a:p>
-          <a:p>
-            <a:pPr lvl="3"/>
-            <a:r>
-              <a:t/>
-            </a:r>
-          </a:p>
-          <a:p>
-            <a:pPr lvl="4"/>
-            <a:r>
-              <a:t/>
             </a:r>
           </a:p>
         </p:txBody>
@@ -2213,7 +2238,7 @@
           </a:prstGeom>
         </p:spPr>
         <p:txBody>
-          <a:bodyPr lIns="91439" tIns="45719" rIns="91439" bIns="45719">
+          <a:bodyPr lIns="91439" tIns="45719" rIns="91439" bIns="45719" numCol="1" spcCol="38100">
             <a:noAutofit/>
           </a:bodyPr>
           <a:lstStyle/>
@@ -2233,7 +2258,7 @@
         <p:spPr>
           <a:xfrm>
             <a:off x="1206500" y="1270000"/>
-            <a:ext cx="9779000" cy="5882273"/>
+            <a:ext cx="9779000" cy="5882274"/>
           </a:xfrm>
           <a:prstGeom prst="rect">
             <a:avLst/>
@@ -2268,7 +2293,7 @@
           </a:prstGeom>
         </p:spPr>
         <p:txBody>
-          <a:bodyPr/>
+          <a:bodyPr numCol="1" spcCol="38100"/>
           <a:lstStyle>
             <a:lvl1pPr marL="0" indent="0" defTabSz="825500">
               <a:lnSpc>
@@ -2281,7 +2306,7 @@
               <a:buNone/>
               <a:defRPr b="1" sz="5500"/>
             </a:lvl1pPr>
-            <a:lvl2pPr marL="0" indent="457200" defTabSz="825500">
+            <a:lvl2pPr marL="0" indent="0" defTabSz="825500">
               <a:lnSpc>
                 <a:spcPct val="100000"/>
               </a:lnSpc>
@@ -2292,7 +2317,7 @@
               <a:buNone/>
               <a:defRPr b="1" sz="5500"/>
             </a:lvl2pPr>
-            <a:lvl3pPr marL="0" indent="914400" defTabSz="825500">
+            <a:lvl3pPr marL="0" indent="0" defTabSz="825500">
               <a:lnSpc>
                 <a:spcPct val="100000"/>
               </a:lnSpc>
@@ -2303,7 +2328,7 @@
               <a:buNone/>
               <a:defRPr b="1" sz="5500"/>
             </a:lvl3pPr>
-            <a:lvl4pPr marL="0" indent="1371600" defTabSz="825500">
+            <a:lvl4pPr marL="0" indent="0" defTabSz="825500">
               <a:lnSpc>
                 <a:spcPct val="100000"/>
               </a:lnSpc>
@@ -2314,7 +2339,7 @@
               <a:buNone/>
               <a:defRPr b="1" sz="5500"/>
             </a:lvl4pPr>
-            <a:lvl5pPr marL="0" indent="1828800" defTabSz="825500">
+            <a:lvl5pPr marL="0" indent="0" defTabSz="825500">
               <a:lnSpc>
                 <a:spcPct val="100000"/>
               </a:lnSpc>
@@ -2368,8 +2393,8 @@
         </p:nvSpPr>
         <p:spPr>
           <a:xfrm>
-            <a:off x="12001499" y="13085233"/>
-            <a:ext cx="368505" cy="374600"/>
+            <a:off x="12001500" y="13085233"/>
+            <a:ext cx="368504" cy="374600"/>
           </a:xfrm>
           <a:prstGeom prst="rect">
             <a:avLst/>
@@ -2419,6 +2444,10 @@
           </p:nvPr>
         </p:nvSpPr>
         <p:spPr>
+          <a:xfrm>
+            <a:off x="1206500" y="1079500"/>
+            <a:ext cx="21971000" cy="1433164"/>
+          </a:xfrm>
           <a:prstGeom prst="rect">
             <a:avLst/>
           </a:prstGeom>
@@ -2436,23 +2465,23 @@
       </p:sp>
       <p:sp>
         <p:nvSpPr>
-          <p:cNvPr id="43" name="Slide Subtitle"/>
+          <p:cNvPr id="43" name="Body Level One…"/>
           <p:cNvSpPr txBox="1"/>
           <p:nvPr>
-            <p:ph type="body" sz="quarter" idx="21" hasCustomPrompt="1"/>
+            <p:ph type="body" sz="quarter" idx="1" hasCustomPrompt="1"/>
           </p:nvPr>
         </p:nvSpPr>
         <p:spPr>
           <a:xfrm>
-            <a:off x="1206500" y="2372962"/>
-            <a:ext cx="21971000" cy="934780"/>
+            <a:off x="1206500" y="2372961"/>
+            <a:ext cx="21971000" cy="934781"/>
           </a:xfrm>
           <a:prstGeom prst="rect">
             <a:avLst/>
           </a:prstGeom>
         </p:spPr>
         <p:txBody>
-          <a:bodyPr lIns="45719" tIns="45719" rIns="45719" bIns="45719"/>
+          <a:bodyPr lIns="45718" tIns="45718" rIns="45718" bIns="45718" numCol="1" spcCol="38100"/>
           <a:lstStyle>
             <a:lvl1pPr marL="0" indent="0" defTabSz="825500">
               <a:lnSpc>
@@ -2465,11 +2494,71 @@
               <a:buNone/>
               <a:defRPr b="1" sz="5500"/>
             </a:lvl1pPr>
+            <a:lvl2pPr marL="1308100" indent="-698500" defTabSz="825500">
+              <a:lnSpc>
+                <a:spcPct val="100000"/>
+              </a:lnSpc>
+              <a:spcBef>
+                <a:spcPts val="0"/>
+              </a:spcBef>
+              <a:defRPr b="1" sz="5500"/>
+            </a:lvl2pPr>
+            <a:lvl3pPr marL="1917700" indent="-698500" defTabSz="825500">
+              <a:lnSpc>
+                <a:spcPct val="100000"/>
+              </a:lnSpc>
+              <a:spcBef>
+                <a:spcPts val="0"/>
+              </a:spcBef>
+              <a:defRPr b="1" sz="5500"/>
+            </a:lvl3pPr>
+            <a:lvl4pPr marL="2527300" indent="-698500" defTabSz="825500">
+              <a:lnSpc>
+                <a:spcPct val="100000"/>
+              </a:lnSpc>
+              <a:spcBef>
+                <a:spcPts val="0"/>
+              </a:spcBef>
+              <a:defRPr b="1" sz="5500"/>
+            </a:lvl4pPr>
+            <a:lvl5pPr marL="3136900" indent="-698500" defTabSz="825500">
+              <a:lnSpc>
+                <a:spcPct val="100000"/>
+              </a:lnSpc>
+              <a:spcBef>
+                <a:spcPts val="0"/>
+              </a:spcBef>
+              <a:defRPr b="1" sz="5500"/>
+            </a:lvl5pPr>
           </a:lstStyle>
           <a:p>
             <a:pPr/>
             <a:r>
               <a:t>Slide Subtitle</a:t>
+            </a:r>
+          </a:p>
+          <a:p>
+            <a:pPr lvl="1"/>
+            <a:r>
+              <a:t/>
+            </a:r>
+          </a:p>
+          <a:p>
+            <a:pPr lvl="2"/>
+            <a:r>
+              <a:t/>
+            </a:r>
+          </a:p>
+          <a:p>
+            <a:pPr lvl="3"/>
+            <a:r>
+              <a:t/>
+            </a:r>
+          </a:p>
+          <a:p>
+            <a:pPr lvl="4"/>
+            <a:r>
+              <a:t/>
             </a:r>
           </a:p>
         </p:txBody>
@@ -2479,45 +2568,25 @@
           <p:cNvPr id="44" name="Body Level One…"/>
           <p:cNvSpPr txBox="1"/>
           <p:nvPr>
-            <p:ph type="body" idx="1" hasCustomPrompt="1"/>
-          </p:nvPr>
-        </p:nvSpPr>
-        <p:spPr>
-          <a:prstGeom prst="rect">
-            <a:avLst/>
-          </a:prstGeom>
-        </p:spPr>
-        <p:txBody>
-          <a:bodyPr/>
+            <p:ph type="body" idx="21" hasCustomPrompt="1"/>
+          </p:nvPr>
+        </p:nvSpPr>
+        <p:spPr>
+          <a:xfrm>
+            <a:off x="1206500" y="4248503"/>
+            <a:ext cx="21971000" cy="8256014"/>
+          </a:xfrm>
+          <a:prstGeom prst="rect">
+            <a:avLst/>
+          </a:prstGeom>
+        </p:spPr>
+        <p:txBody>
+          <a:bodyPr numCol="1" spcCol="38100"/>
           <a:lstStyle/>
           <a:p>
             <a:pPr/>
             <a:r>
               <a:t>Slide bullet text</a:t>
-            </a:r>
-          </a:p>
-          <a:p>
-            <a:pPr lvl="1"/>
-            <a:r>
-              <a:t/>
-            </a:r>
-          </a:p>
-          <a:p>
-            <a:pPr lvl="2"/>
-            <a:r>
-              <a:t/>
-            </a:r>
-          </a:p>
-          <a:p>
-            <a:pPr lvl="3"/>
-            <a:r>
-              <a:t/>
-            </a:r>
-          </a:p>
-          <a:p>
-            <a:pPr lvl="4"/>
-            <a:r>
-              <a:t/>
             </a:r>
           </a:p>
         </p:txBody>
@@ -2584,7 +2653,7 @@
           </a:prstGeom>
         </p:spPr>
         <p:txBody>
-          <a:bodyPr numCol="2" spcCol="1098550"/>
+          <a:bodyPr/>
           <a:lstStyle/>
           <a:p>
             <a:pPr/>
@@ -2668,23 +2737,23 @@
       </p:grpSpPr>
       <p:sp>
         <p:nvSpPr>
-          <p:cNvPr id="60" name="Slide Subtitle"/>
+          <p:cNvPr id="60" name="Body Level One…"/>
           <p:cNvSpPr txBox="1"/>
           <p:nvPr>
-            <p:ph type="body" sz="quarter" idx="21" hasCustomPrompt="1"/>
+            <p:ph type="body" sz="quarter" idx="1" hasCustomPrompt="1"/>
           </p:nvPr>
         </p:nvSpPr>
         <p:spPr>
           <a:xfrm>
-            <a:off x="1206500" y="2372962"/>
-            <a:ext cx="9779000" cy="934780"/>
+            <a:off x="1206500" y="2372961"/>
+            <a:ext cx="9779000" cy="934781"/>
           </a:xfrm>
           <a:prstGeom prst="rect">
             <a:avLst/>
           </a:prstGeom>
         </p:spPr>
         <p:txBody>
-          <a:bodyPr lIns="45719" tIns="45719" rIns="45719" bIns="45719"/>
+          <a:bodyPr lIns="45718" tIns="45718" rIns="45718" bIns="45718" numCol="1" spcCol="38100"/>
           <a:lstStyle>
             <a:lvl1pPr marL="0" indent="0" defTabSz="825500">
               <a:lnSpc>
@@ -2697,11 +2766,71 @@
               <a:buNone/>
               <a:defRPr b="1" sz="5500"/>
             </a:lvl1pPr>
+            <a:lvl2pPr marL="1308100" indent="-698500" defTabSz="825500">
+              <a:lnSpc>
+                <a:spcPct val="100000"/>
+              </a:lnSpc>
+              <a:spcBef>
+                <a:spcPts val="0"/>
+              </a:spcBef>
+              <a:defRPr b="1" sz="5500"/>
+            </a:lvl2pPr>
+            <a:lvl3pPr marL="1917700" indent="-698500" defTabSz="825500">
+              <a:lnSpc>
+                <a:spcPct val="100000"/>
+              </a:lnSpc>
+              <a:spcBef>
+                <a:spcPts val="0"/>
+              </a:spcBef>
+              <a:defRPr b="1" sz="5500"/>
+            </a:lvl3pPr>
+            <a:lvl4pPr marL="2527300" indent="-698500" defTabSz="825500">
+              <a:lnSpc>
+                <a:spcPct val="100000"/>
+              </a:lnSpc>
+              <a:spcBef>
+                <a:spcPts val="0"/>
+              </a:spcBef>
+              <a:defRPr b="1" sz="5500"/>
+            </a:lvl4pPr>
+            <a:lvl5pPr marL="3136900" indent="-698500" defTabSz="825500">
+              <a:lnSpc>
+                <a:spcPct val="100000"/>
+              </a:lnSpc>
+              <a:spcBef>
+                <a:spcPts val="0"/>
+              </a:spcBef>
+              <a:defRPr b="1" sz="5500"/>
+            </a:lvl5pPr>
           </a:lstStyle>
           <a:p>
             <a:pPr/>
             <a:r>
               <a:t>Slide Subtitle</a:t>
+            </a:r>
+          </a:p>
+          <a:p>
+            <a:pPr lvl="1"/>
+            <a:r>
+              <a:t/>
+            </a:r>
+          </a:p>
+          <a:p>
+            <a:pPr lvl="2"/>
+            <a:r>
+              <a:t/>
+            </a:r>
+          </a:p>
+          <a:p>
+            <a:pPr lvl="3"/>
+            <a:r>
+              <a:t/>
+            </a:r>
+          </a:p>
+          <a:p>
+            <a:pPr lvl="4"/>
+            <a:r>
+              <a:t/>
             </a:r>
           </a:p>
         </p:txBody>
@@ -2711,49 +2840,25 @@
           <p:cNvPr id="61" name="Body Level One…"/>
           <p:cNvSpPr txBox="1"/>
           <p:nvPr>
-            <p:ph type="body" sz="half" idx="1" hasCustomPrompt="1"/>
+            <p:ph type="body" sz="half" idx="21" hasCustomPrompt="1"/>
           </p:nvPr>
         </p:nvSpPr>
         <p:spPr>
           <a:xfrm>
-            <a:off x="1206500" y="4248504"/>
-            <a:ext cx="9779000" cy="8256630"/>
+            <a:off x="1206500" y="4248503"/>
+            <a:ext cx="9779000" cy="8256631"/>
           </a:xfrm>
           <a:prstGeom prst="rect">
             <a:avLst/>
           </a:prstGeom>
         </p:spPr>
         <p:txBody>
-          <a:bodyPr/>
+          <a:bodyPr numCol="1" spcCol="38100"/>
           <a:lstStyle/>
           <a:p>
             <a:pPr/>
             <a:r>
               <a:t>Slide bullet text</a:t>
-            </a:r>
-          </a:p>
-          <a:p>
-            <a:pPr lvl="1"/>
-            <a:r>
-              <a:t/>
-            </a:r>
-          </a:p>
-          <a:p>
-            <a:pPr lvl="2"/>
-            <a:r>
-              <a:t/>
-            </a:r>
-          </a:p>
-          <a:p>
-            <a:pPr lvl="3"/>
-            <a:r>
-              <a:t/>
-            </a:r>
-          </a:p>
-          <a:p>
-            <a:pPr lvl="4"/>
-            <a:r>
-              <a:t/>
             </a:r>
           </a:p>
         </p:txBody>
@@ -2768,15 +2873,15 @@
         </p:nvSpPr>
         <p:spPr>
           <a:xfrm>
-            <a:off x="9271000" y="1263848"/>
-            <a:ext cx="16773843" cy="11188205"/>
+            <a:off x="9271000" y="1263847"/>
+            <a:ext cx="16773843" cy="11188206"/>
           </a:xfrm>
           <a:prstGeom prst="rect">
             <a:avLst/>
           </a:prstGeom>
         </p:spPr>
         <p:txBody>
-          <a:bodyPr lIns="91439" tIns="45719" rIns="91439" bIns="45719">
+          <a:bodyPr lIns="91439" tIns="45719" rIns="91439" bIns="45719" numCol="1" spcCol="38100">
             <a:noAutofit/>
           </a:bodyPr>
           <a:lstStyle/>
@@ -2863,23 +2968,23 @@
       </p:grpSpPr>
       <p:sp>
         <p:nvSpPr>
-          <p:cNvPr id="71" name="Slide Subtitle"/>
+          <p:cNvPr id="71" name="Body Level One…"/>
           <p:cNvSpPr txBox="1"/>
           <p:nvPr>
-            <p:ph type="body" sz="quarter" idx="21" hasCustomPrompt="1"/>
+            <p:ph type="body" sz="quarter" idx="1" hasCustomPrompt="1"/>
           </p:nvPr>
         </p:nvSpPr>
         <p:spPr>
           <a:xfrm>
-            <a:off x="1206500" y="2372962"/>
-            <a:ext cx="9779000" cy="934780"/>
+            <a:off x="1206500" y="2372961"/>
+            <a:ext cx="9779000" cy="934781"/>
           </a:xfrm>
           <a:prstGeom prst="rect">
             <a:avLst/>
           </a:prstGeom>
         </p:spPr>
         <p:txBody>
-          <a:bodyPr lIns="45719" tIns="45719" rIns="45719" bIns="45719"/>
+          <a:bodyPr lIns="45718" tIns="45718" rIns="45718" bIns="45718" numCol="1" spcCol="38100"/>
           <a:lstStyle>
             <a:lvl1pPr marL="0" indent="0" defTabSz="825500">
               <a:lnSpc>
@@ -2892,11 +2997,71 @@
               <a:buNone/>
               <a:defRPr b="1" sz="5500"/>
             </a:lvl1pPr>
+            <a:lvl2pPr marL="1308100" indent="-698500" defTabSz="825500">
+              <a:lnSpc>
+                <a:spcPct val="100000"/>
+              </a:lnSpc>
+              <a:spcBef>
+                <a:spcPts val="0"/>
+              </a:spcBef>
+              <a:defRPr b="1" sz="5500"/>
+            </a:lvl2pPr>
+            <a:lvl3pPr marL="1917700" indent="-698500" defTabSz="825500">
+              <a:lnSpc>
+                <a:spcPct val="100000"/>
+              </a:lnSpc>
+              <a:spcBef>
+                <a:spcPts val="0"/>
+              </a:spcBef>
+              <a:defRPr b="1" sz="5500"/>
+            </a:lvl3pPr>
+            <a:lvl4pPr marL="2527300" indent="-698500" defTabSz="825500">
+              <a:lnSpc>
+                <a:spcPct val="100000"/>
+              </a:lnSpc>
+              <a:spcBef>
+                <a:spcPts val="0"/>
+              </a:spcBef>
+              <a:defRPr b="1" sz="5500"/>
+            </a:lvl4pPr>
+            <a:lvl5pPr marL="3136900" indent="-698500" defTabSz="825500">
+              <a:lnSpc>
+                <a:spcPct val="100000"/>
+              </a:lnSpc>
+              <a:spcBef>
+                <a:spcPts val="0"/>
+              </a:spcBef>
+              <a:defRPr b="1" sz="5500"/>
+            </a:lvl5pPr>
           </a:lstStyle>
           <a:p>
             <a:pPr/>
             <a:r>
               <a:t>Slide Subtitle</a:t>
+            </a:r>
+          </a:p>
+          <a:p>
+            <a:pPr lvl="1"/>
+            <a:r>
+              <a:t/>
+            </a:r>
+          </a:p>
+          <a:p>
+            <a:pPr lvl="2"/>
+            <a:r>
+              <a:t/>
+            </a:r>
+          </a:p>
+          <a:p>
+            <a:pPr lvl="3"/>
+            <a:r>
+              <a:t/>
+            </a:r>
+          </a:p>
+          <a:p>
+            <a:pPr lvl="4"/>
+            <a:r>
+              <a:t/>
             </a:r>
           </a:p>
         </p:txBody>
@@ -2906,49 +3071,25 @@
           <p:cNvPr id="72" name="Body Level One…"/>
           <p:cNvSpPr txBox="1"/>
           <p:nvPr>
-            <p:ph type="body" sz="half" idx="1" hasCustomPrompt="1"/>
+            <p:ph type="body" sz="half" idx="21" hasCustomPrompt="1"/>
           </p:nvPr>
         </p:nvSpPr>
         <p:spPr>
           <a:xfrm>
-            <a:off x="1206500" y="4248504"/>
-            <a:ext cx="9779000" cy="8256630"/>
+            <a:off x="1206500" y="4248503"/>
+            <a:ext cx="9779000" cy="8256631"/>
           </a:xfrm>
           <a:prstGeom prst="rect">
             <a:avLst/>
           </a:prstGeom>
         </p:spPr>
         <p:txBody>
-          <a:bodyPr/>
+          <a:bodyPr numCol="1" spcCol="38100"/>
           <a:lstStyle/>
           <a:p>
             <a:pPr/>
             <a:r>
               <a:t>Slide bullet text</a:t>
-            </a:r>
-          </a:p>
-          <a:p>
-            <a:pPr lvl="1"/>
-            <a:r>
-              <a:t/>
-            </a:r>
-          </a:p>
-          <a:p>
-            <a:pPr lvl="2"/>
-            <a:r>
-              <a:t/>
-            </a:r>
-          </a:p>
-          <a:p>
-            <a:pPr lvl="3"/>
-            <a:r>
-              <a:t/>
-            </a:r>
-          </a:p>
-          <a:p>
-            <a:pPr lvl="4"/>
-            <a:r>
-              <a:t/>
             </a:r>
           </a:p>
         </p:txBody>
@@ -3031,23 +3172,23 @@
       </p:grpSpPr>
       <p:sp>
         <p:nvSpPr>
-          <p:cNvPr id="81" name="Slide Subtitle"/>
+          <p:cNvPr id="81" name="Body Level One…"/>
           <p:cNvSpPr txBox="1"/>
           <p:nvPr>
-            <p:ph type="body" sz="quarter" idx="21" hasCustomPrompt="1"/>
+            <p:ph type="body" sz="quarter" idx="1" hasCustomPrompt="1"/>
           </p:nvPr>
         </p:nvSpPr>
         <p:spPr>
           <a:xfrm>
-            <a:off x="1206500" y="2372962"/>
-            <a:ext cx="9779000" cy="934780"/>
+            <a:off x="1206500" y="2372961"/>
+            <a:ext cx="9779000" cy="934781"/>
           </a:xfrm>
           <a:prstGeom prst="rect">
             <a:avLst/>
           </a:prstGeom>
         </p:spPr>
         <p:txBody>
-          <a:bodyPr lIns="45719" tIns="45719" rIns="45719" bIns="45719"/>
+          <a:bodyPr lIns="45718" tIns="45718" rIns="45718" bIns="45718" numCol="1" spcCol="38100"/>
           <a:lstStyle>
             <a:lvl1pPr marL="0" indent="0" defTabSz="825500">
               <a:lnSpc>
@@ -3060,11 +3201,71 @@
               <a:buNone/>
               <a:defRPr b="1" sz="5500"/>
             </a:lvl1pPr>
+            <a:lvl2pPr marL="1308100" indent="-698500" defTabSz="825500">
+              <a:lnSpc>
+                <a:spcPct val="100000"/>
+              </a:lnSpc>
+              <a:spcBef>
+                <a:spcPts val="0"/>
+              </a:spcBef>
+              <a:defRPr b="1" sz="5500"/>
+            </a:lvl2pPr>
+            <a:lvl3pPr marL="1917700" indent="-698500" defTabSz="825500">
+              <a:lnSpc>
+                <a:spcPct val="100000"/>
+              </a:lnSpc>
+              <a:spcBef>
+                <a:spcPts val="0"/>
+              </a:spcBef>
+              <a:defRPr b="1" sz="5500"/>
+            </a:lvl3pPr>
+            <a:lvl4pPr marL="2527300" indent="-698500" defTabSz="825500">
+              <a:lnSpc>
+                <a:spcPct val="100000"/>
+              </a:lnSpc>
+              <a:spcBef>
+                <a:spcPts val="0"/>
+              </a:spcBef>
+              <a:defRPr b="1" sz="5500"/>
+            </a:lvl4pPr>
+            <a:lvl5pPr marL="3136900" indent="-698500" defTabSz="825500">
+              <a:lnSpc>
+                <a:spcPct val="100000"/>
+              </a:lnSpc>
+              <a:spcBef>
+                <a:spcPts val="0"/>
+              </a:spcBef>
+              <a:defRPr b="1" sz="5500"/>
+            </a:lvl5pPr>
           </a:lstStyle>
           <a:p>
             <a:pPr/>
             <a:r>
               <a:t>Slide Subtitle</a:t>
+            </a:r>
+          </a:p>
+          <a:p>
+            <a:pPr lvl="1"/>
+            <a:r>
+              <a:t/>
+            </a:r>
+          </a:p>
+          <a:p>
+            <a:pPr lvl="2"/>
+            <a:r>
+              <a:t/>
+            </a:r>
+          </a:p>
+          <a:p>
+            <a:pPr lvl="3"/>
+            <a:r>
+              <a:t/>
+            </a:r>
+          </a:p>
+          <a:p>
+            <a:pPr lvl="4"/>
+            <a:r>
+              <a:t/>
             </a:r>
           </a:p>
         </p:txBody>
@@ -3074,49 +3275,25 @@
           <p:cNvPr id="82" name="Body Level One…"/>
           <p:cNvSpPr txBox="1"/>
           <p:nvPr>
-            <p:ph type="body" sz="half" idx="1" hasCustomPrompt="1"/>
+            <p:ph type="body" sz="half" idx="21" hasCustomPrompt="1"/>
           </p:nvPr>
         </p:nvSpPr>
         <p:spPr>
           <a:xfrm>
-            <a:off x="1206500" y="4248504"/>
-            <a:ext cx="9779000" cy="8256630"/>
+            <a:off x="1206500" y="4248503"/>
+            <a:ext cx="9779000" cy="8256631"/>
           </a:xfrm>
           <a:prstGeom prst="rect">
             <a:avLst/>
           </a:prstGeom>
         </p:spPr>
         <p:txBody>
-          <a:bodyPr/>
+          <a:bodyPr numCol="1" spcCol="38100"/>
           <a:lstStyle/>
           <a:p>
             <a:pPr/>
             <a:r>
               <a:t>Slide bullet text</a:t>
-            </a:r>
-          </a:p>
-          <a:p>
-            <a:pPr lvl="1"/>
-            <a:r>
-              <a:t/>
-            </a:r>
-          </a:p>
-          <a:p>
-            <a:pPr lvl="2"/>
-            <a:r>
-              <a:t/>
-            </a:r>
-          </a:p>
-          <a:p>
-            <a:pPr lvl="3"/>
-            <a:r>
-              <a:t/>
-            </a:r>
-          </a:p>
-          <a:p>
-            <a:pPr lvl="4"/>
-            <a:r>
-              <a:t/>
             </a:r>
           </a:p>
         </p:txBody>
@@ -3208,7 +3385,7 @@
         <p:spPr>
           <a:xfrm>
             <a:off x="1206496" y="4533900"/>
-            <a:ext cx="21971004" cy="4648200"/>
+            <a:ext cx="21971005" cy="4648200"/>
           </a:xfrm>
           <a:prstGeom prst="rect">
             <a:avLst/>
@@ -3244,8 +3421,8 @@
         </p:nvSpPr>
         <p:spPr>
           <a:xfrm>
-            <a:off x="12001499" y="13085233"/>
-            <a:ext cx="368505" cy="374600"/>
+            <a:off x="12001500" y="13085233"/>
+            <a:ext cx="368504" cy="374600"/>
           </a:xfrm>
           <a:prstGeom prst="rect">
             <a:avLst/>
@@ -3299,16 +3476,16 @@
       </p:grpSpPr>
       <p:sp>
         <p:nvSpPr>
-          <p:cNvPr id="2" name="Slide Title"/>
+          <p:cNvPr id="2" name="Body Level One…"/>
           <p:cNvSpPr txBox="1"/>
           <p:nvPr>
-            <p:ph type="title" hasCustomPrompt="1"/>
+            <p:ph type="body" idx="1" hasCustomPrompt="1"/>
           </p:nvPr>
         </p:nvSpPr>
         <p:spPr>
           <a:xfrm>
-            <a:off x="1206500" y="1079500"/>
-            <a:ext cx="21971000" cy="1433163"/>
+            <a:off x="1206500" y="4248503"/>
+            <a:ext cx="21971000" cy="8256014"/>
           </a:xfrm>
           <a:prstGeom prst="rect">
             <a:avLst/>
@@ -3323,30 +3500,54 @@
           </a:extLst>
         </p:spPr>
         <p:txBody>
-          <a:bodyPr lIns="50800" tIns="50800" rIns="50800" bIns="50800">
+          <a:bodyPr lIns="50800" tIns="50800" rIns="50800" bIns="50800" numCol="2" spcCol="1098550">
             <a:normAutofit fontScale="100000" lnSpcReduction="0"/>
           </a:bodyPr>
           <a:lstStyle/>
           <a:p>
             <a:pPr/>
             <a:r>
-              <a:t>Slide Title</a:t>
-            </a:r>
-          </a:p>
-        </p:txBody>
-      </p:sp>
-      <p:sp>
-        <p:nvSpPr>
-          <p:cNvPr id="3" name="Body Level One…"/>
+              <a:t>Slide bullet text</a:t>
+            </a:r>
+          </a:p>
+          <a:p>
+            <a:pPr lvl="1"/>
+            <a:r>
+              <a:t/>
+            </a:r>
+          </a:p>
+          <a:p>
+            <a:pPr lvl="2"/>
+            <a:r>
+              <a:t/>
+            </a:r>
+          </a:p>
+          <a:p>
+            <a:pPr lvl="3"/>
+            <a:r>
+              <a:t/>
+            </a:r>
+          </a:p>
+          <a:p>
+            <a:pPr lvl="4"/>
+            <a:r>
+              <a:t/>
+            </a:r>
+          </a:p>
+        </p:txBody>
+      </p:sp>
+      <p:sp>
+        <p:nvSpPr>
+          <p:cNvPr id="3" name="Title Text"/>
           <p:cNvSpPr txBox="1"/>
           <p:nvPr>
-            <p:ph type="body" idx="1" hasCustomPrompt="1"/>
+            <p:ph type="title"/>
           </p:nvPr>
         </p:nvSpPr>
         <p:spPr>
           <a:xfrm>
-            <a:off x="1206500" y="4248504"/>
-            <a:ext cx="21971000" cy="8256012"/>
+            <a:off x="3653366" y="2743200"/>
+            <a:ext cx="19507201" cy="1505304"/>
           </a:xfrm>
           <a:prstGeom prst="rect">
             <a:avLst/>
@@ -3368,31 +3569,7 @@
           <a:p>
             <a:pPr/>
             <a:r>
-              <a:t>Slide bullet text</a:t>
-            </a:r>
-          </a:p>
-          <a:p>
-            <a:pPr lvl="1"/>
-            <a:r>
-              <a:t/>
-            </a:r>
-          </a:p>
-          <a:p>
-            <a:pPr lvl="2"/>
-            <a:r>
-              <a:t/>
-            </a:r>
-          </a:p>
-          <a:p>
-            <a:pPr lvl="3"/>
-            <a:r>
-              <a:t/>
-            </a:r>
-          </a:p>
-          <a:p>
-            <a:pPr lvl="4"/>
-            <a:r>
-              <a:t/>
+              <a:t>Title Text</a:t>
             </a:r>
           </a:p>
         </p:txBody>
@@ -3407,8 +3584,8 @@
         </p:nvSpPr>
         <p:spPr>
           <a:xfrm>
-            <a:off x="12001499" y="13080999"/>
-            <a:ext cx="368505" cy="374600"/>
+            <a:off x="12001500" y="13080999"/>
+            <a:ext cx="368504" cy="374600"/>
           </a:xfrm>
           <a:prstGeom prst="rect">
             <a:avLst/>
@@ -3463,7 +3640,7 @@
   <p:transition xmlns:p14="http://schemas.microsoft.com/office/powerpoint/2010/main" spd="med" advClick="1"/>
   <p:txStyles>
     <p:titleStyle>
-      <a:lvl1pPr marL="0" marR="0" indent="0" algn="l" defTabSz="2438338" rtl="0" latinLnBrk="0">
+      <a:lvl1pPr marL="0" marR="0" indent="0" algn="l" defTabSz="2438337" rtl="0" latinLnBrk="0">
         <a:lnSpc>
           <a:spcPct val="80000"/>
         </a:lnSpc>
@@ -3483,13 +3660,13 @@
             <a:srgbClr val="000000"/>
           </a:solidFill>
           <a:uFillTx/>
-          <a:latin typeface="+mn-lt"/>
-          <a:ea typeface="+mn-ea"/>
-          <a:cs typeface="+mn-cs"/>
+          <a:latin typeface="+mj-lt"/>
+          <a:ea typeface="+mj-ea"/>
+          <a:cs typeface="+mj-cs"/>
           <a:sym typeface="Helvetica Neue"/>
         </a:defRPr>
       </a:lvl1pPr>
-      <a:lvl2pPr marL="0" marR="0" indent="457200" algn="l" defTabSz="2438338" rtl="0" latinLnBrk="0">
+      <a:lvl2pPr marL="0" marR="0" indent="0" algn="l" defTabSz="2438337" rtl="0" latinLnBrk="0">
         <a:lnSpc>
           <a:spcPct val="80000"/>
         </a:lnSpc>
@@ -3509,13 +3686,13 @@
             <a:srgbClr val="000000"/>
           </a:solidFill>
           <a:uFillTx/>
-          <a:latin typeface="+mn-lt"/>
-          <a:ea typeface="+mn-ea"/>
-          <a:cs typeface="+mn-cs"/>
+          <a:latin typeface="+mj-lt"/>
+          <a:ea typeface="+mj-ea"/>
+          <a:cs typeface="+mj-cs"/>
           <a:sym typeface="Helvetica Neue"/>
         </a:defRPr>
       </a:lvl2pPr>
-      <a:lvl3pPr marL="0" marR="0" indent="914400" algn="l" defTabSz="2438338" rtl="0" latinLnBrk="0">
+      <a:lvl3pPr marL="0" marR="0" indent="0" algn="l" defTabSz="2438337" rtl="0" latinLnBrk="0">
         <a:lnSpc>
           <a:spcPct val="80000"/>
         </a:lnSpc>
@@ -3535,13 +3712,13 @@
             <a:srgbClr val="000000"/>
           </a:solidFill>
           <a:uFillTx/>
-          <a:latin typeface="+mn-lt"/>
-          <a:ea typeface="+mn-ea"/>
-          <a:cs typeface="+mn-cs"/>
+          <a:latin typeface="+mj-lt"/>
+          <a:ea typeface="+mj-ea"/>
+          <a:cs typeface="+mj-cs"/>
           <a:sym typeface="Helvetica Neue"/>
         </a:defRPr>
       </a:lvl3pPr>
-      <a:lvl4pPr marL="0" marR="0" indent="1371600" algn="l" defTabSz="2438338" rtl="0" latinLnBrk="0">
+      <a:lvl4pPr marL="0" marR="0" indent="0" algn="l" defTabSz="2438337" rtl="0" latinLnBrk="0">
         <a:lnSpc>
           <a:spcPct val="80000"/>
         </a:lnSpc>
@@ -3561,13 +3738,13 @@
             <a:srgbClr val="000000"/>
           </a:solidFill>
           <a:uFillTx/>
-          <a:latin typeface="+mn-lt"/>
-          <a:ea typeface="+mn-ea"/>
-          <a:cs typeface="+mn-cs"/>
+          <a:latin typeface="+mj-lt"/>
+          <a:ea typeface="+mj-ea"/>
+          <a:cs typeface="+mj-cs"/>
           <a:sym typeface="Helvetica Neue"/>
         </a:defRPr>
       </a:lvl4pPr>
-      <a:lvl5pPr marL="0" marR="0" indent="1828800" algn="l" defTabSz="2438338" rtl="0" latinLnBrk="0">
+      <a:lvl5pPr marL="0" marR="0" indent="0" algn="l" defTabSz="2438337" rtl="0" latinLnBrk="0">
         <a:lnSpc>
           <a:spcPct val="80000"/>
         </a:lnSpc>
@@ -3587,13 +3764,13 @@
             <a:srgbClr val="000000"/>
           </a:solidFill>
           <a:uFillTx/>
-          <a:latin typeface="+mn-lt"/>
-          <a:ea typeface="+mn-ea"/>
-          <a:cs typeface="+mn-cs"/>
+          <a:latin typeface="+mj-lt"/>
+          <a:ea typeface="+mj-ea"/>
+          <a:cs typeface="+mj-cs"/>
           <a:sym typeface="Helvetica Neue"/>
         </a:defRPr>
       </a:lvl5pPr>
-      <a:lvl6pPr marL="0" marR="0" indent="2286000" algn="l" defTabSz="2438338" rtl="0" latinLnBrk="0">
+      <a:lvl6pPr marL="0" marR="0" indent="0" algn="l" defTabSz="2438337" rtl="0" latinLnBrk="0">
         <a:lnSpc>
           <a:spcPct val="80000"/>
         </a:lnSpc>
@@ -3613,13 +3790,13 @@
             <a:srgbClr val="000000"/>
           </a:solidFill>
           <a:uFillTx/>
-          <a:latin typeface="+mn-lt"/>
-          <a:ea typeface="+mn-ea"/>
-          <a:cs typeface="+mn-cs"/>
+          <a:latin typeface="+mj-lt"/>
+          <a:ea typeface="+mj-ea"/>
+          <a:cs typeface="+mj-cs"/>
           <a:sym typeface="Helvetica Neue"/>
         </a:defRPr>
       </a:lvl6pPr>
-      <a:lvl7pPr marL="0" marR="0" indent="2743200" algn="l" defTabSz="2438338" rtl="0" latinLnBrk="0">
+      <a:lvl7pPr marL="0" marR="0" indent="0" algn="l" defTabSz="2438337" rtl="0" latinLnBrk="0">
         <a:lnSpc>
           <a:spcPct val="80000"/>
         </a:lnSpc>
@@ -3639,13 +3816,13 @@
             <a:srgbClr val="000000"/>
           </a:solidFill>
           <a:uFillTx/>
-          <a:latin typeface="+mn-lt"/>
-          <a:ea typeface="+mn-ea"/>
-          <a:cs typeface="+mn-cs"/>
+          <a:latin typeface="+mj-lt"/>
+          <a:ea typeface="+mj-ea"/>
+          <a:cs typeface="+mj-cs"/>
           <a:sym typeface="Helvetica Neue"/>
         </a:defRPr>
       </a:lvl7pPr>
-      <a:lvl8pPr marL="0" marR="0" indent="3200400" algn="l" defTabSz="2438338" rtl="0" latinLnBrk="0">
+      <a:lvl8pPr marL="0" marR="0" indent="0" algn="l" defTabSz="2438337" rtl="0" latinLnBrk="0">
         <a:lnSpc>
           <a:spcPct val="80000"/>
         </a:lnSpc>
@@ -3665,13 +3842,13 @@
             <a:srgbClr val="000000"/>
           </a:solidFill>
           <a:uFillTx/>
-          <a:latin typeface="+mn-lt"/>
-          <a:ea typeface="+mn-ea"/>
-          <a:cs typeface="+mn-cs"/>
+          <a:latin typeface="+mj-lt"/>
+          <a:ea typeface="+mj-ea"/>
+          <a:cs typeface="+mj-cs"/>
           <a:sym typeface="Helvetica Neue"/>
         </a:defRPr>
       </a:lvl8pPr>
-      <a:lvl9pPr marL="0" marR="0" indent="3657600" algn="l" defTabSz="2438338" rtl="0" latinLnBrk="0">
+      <a:lvl9pPr marL="0" marR="0" indent="0" algn="l" defTabSz="2438337" rtl="0" latinLnBrk="0">
         <a:lnSpc>
           <a:spcPct val="80000"/>
         </a:lnSpc>
@@ -3691,15 +3868,15 @@
             <a:srgbClr val="000000"/>
           </a:solidFill>
           <a:uFillTx/>
-          <a:latin typeface="+mn-lt"/>
-          <a:ea typeface="+mn-ea"/>
-          <a:cs typeface="+mn-cs"/>
+          <a:latin typeface="+mj-lt"/>
+          <a:ea typeface="+mj-ea"/>
+          <a:cs typeface="+mj-cs"/>
           <a:sym typeface="Helvetica Neue"/>
         </a:defRPr>
       </a:lvl9pPr>
     </p:titleStyle>
     <p:bodyStyle>
-      <a:lvl1pPr marL="609600" marR="0" indent="-609600" algn="l" defTabSz="2438338" rtl="0" latinLnBrk="0">
+      <a:lvl1pPr marL="609600" marR="0" indent="-609600" algn="l" defTabSz="2438337" rtl="0" latinLnBrk="0">
         <a:lnSpc>
           <a:spcPct val="90000"/>
         </a:lnSpc>
@@ -3719,13 +3896,13 @@
             <a:srgbClr val="000000"/>
           </a:solidFill>
           <a:uFillTx/>
-          <a:latin typeface="+mn-lt"/>
-          <a:ea typeface="+mn-ea"/>
-          <a:cs typeface="+mn-cs"/>
+          <a:latin typeface="+mj-lt"/>
+          <a:ea typeface="+mj-ea"/>
+          <a:cs typeface="+mj-cs"/>
           <a:sym typeface="Helvetica Neue"/>
         </a:defRPr>
       </a:lvl1pPr>
-      <a:lvl2pPr marL="1219200" marR="0" indent="-609600" algn="l" defTabSz="2438338" rtl="0" latinLnBrk="0">
+      <a:lvl2pPr marL="1219200" marR="0" indent="-609600" algn="l" defTabSz="2438337" rtl="0" latinLnBrk="0">
         <a:lnSpc>
           <a:spcPct val="90000"/>
         </a:lnSpc>
@@ -3745,13 +3922,13 @@
             <a:srgbClr val="000000"/>
           </a:solidFill>
           <a:uFillTx/>
-          <a:latin typeface="+mn-lt"/>
-          <a:ea typeface="+mn-ea"/>
-          <a:cs typeface="+mn-cs"/>
+          <a:latin typeface="+mj-lt"/>
+          <a:ea typeface="+mj-ea"/>
+          <a:cs typeface="+mj-cs"/>
           <a:sym typeface="Helvetica Neue"/>
         </a:defRPr>
       </a:lvl2pPr>
-      <a:lvl3pPr marL="1828800" marR="0" indent="-609600" algn="l" defTabSz="2438338" rtl="0" latinLnBrk="0">
+      <a:lvl3pPr marL="1828800" marR="0" indent="-609600" algn="l" defTabSz="2438337" rtl="0" latinLnBrk="0">
         <a:lnSpc>
           <a:spcPct val="90000"/>
         </a:lnSpc>
@@ -3771,13 +3948,13 @@
             <a:srgbClr val="000000"/>
           </a:solidFill>
           <a:uFillTx/>
-          <a:latin typeface="+mn-lt"/>
-          <a:ea typeface="+mn-ea"/>
-          <a:cs typeface="+mn-cs"/>
+          <a:latin typeface="+mj-lt"/>
+          <a:ea typeface="+mj-ea"/>
+          <a:cs typeface="+mj-cs"/>
           <a:sym typeface="Helvetica Neue"/>
         </a:defRPr>
       </a:lvl3pPr>
-      <a:lvl4pPr marL="2438400" marR="0" indent="-609600" algn="l" defTabSz="2438338" rtl="0" latinLnBrk="0">
+      <a:lvl4pPr marL="2438400" marR="0" indent="-609600" algn="l" defTabSz="2438337" rtl="0" latinLnBrk="0">
         <a:lnSpc>
           <a:spcPct val="90000"/>
         </a:lnSpc>
@@ -3797,13 +3974,13 @@
             <a:srgbClr val="000000"/>
           </a:solidFill>
           <a:uFillTx/>
-          <a:latin typeface="+mn-lt"/>
-          <a:ea typeface="+mn-ea"/>
-          <a:cs typeface="+mn-cs"/>
+          <a:latin typeface="+mj-lt"/>
+          <a:ea typeface="+mj-ea"/>
+          <a:cs typeface="+mj-cs"/>
           <a:sym typeface="Helvetica Neue"/>
         </a:defRPr>
       </a:lvl4pPr>
-      <a:lvl5pPr marL="3048000" marR="0" indent="-609600" algn="l" defTabSz="2438338" rtl="0" latinLnBrk="0">
+      <a:lvl5pPr marL="3048000" marR="0" indent="-609600" algn="l" defTabSz="2438337" rtl="0" latinLnBrk="0">
         <a:lnSpc>
           <a:spcPct val="90000"/>
         </a:lnSpc>
@@ -3823,13 +4000,13 @@
             <a:srgbClr val="000000"/>
           </a:solidFill>
           <a:uFillTx/>
-          <a:latin typeface="+mn-lt"/>
-          <a:ea typeface="+mn-ea"/>
-          <a:cs typeface="+mn-cs"/>
+          <a:latin typeface="+mj-lt"/>
+          <a:ea typeface="+mj-ea"/>
+          <a:cs typeface="+mj-cs"/>
           <a:sym typeface="Helvetica Neue"/>
         </a:defRPr>
       </a:lvl5pPr>
-      <a:lvl6pPr marL="3657600" marR="0" indent="-609600" algn="l" defTabSz="2438338" rtl="0" latinLnBrk="0">
+      <a:lvl6pPr marL="3657600" marR="0" indent="-609600" algn="l" defTabSz="2438337" rtl="0" latinLnBrk="0">
         <a:lnSpc>
           <a:spcPct val="90000"/>
         </a:lnSpc>
@@ -3849,13 +4026,13 @@
             <a:srgbClr val="000000"/>
           </a:solidFill>
           <a:uFillTx/>
-          <a:latin typeface="+mn-lt"/>
-          <a:ea typeface="+mn-ea"/>
-          <a:cs typeface="+mn-cs"/>
+          <a:latin typeface="+mj-lt"/>
+          <a:ea typeface="+mj-ea"/>
+          <a:cs typeface="+mj-cs"/>
           <a:sym typeface="Helvetica Neue"/>
         </a:defRPr>
       </a:lvl6pPr>
-      <a:lvl7pPr marL="4267200" marR="0" indent="-609600" algn="l" defTabSz="2438338" rtl="0" latinLnBrk="0">
+      <a:lvl7pPr marL="4267200" marR="0" indent="-609600" algn="l" defTabSz="2438337" rtl="0" latinLnBrk="0">
         <a:lnSpc>
           <a:spcPct val="90000"/>
         </a:lnSpc>
@@ -3875,13 +4052,13 @@
             <a:srgbClr val="000000"/>
           </a:solidFill>
           <a:uFillTx/>
-          <a:latin typeface="+mn-lt"/>
-          <a:ea typeface="+mn-ea"/>
-          <a:cs typeface="+mn-cs"/>
+          <a:latin typeface="+mj-lt"/>
+          <a:ea typeface="+mj-ea"/>
+          <a:cs typeface="+mj-cs"/>
           <a:sym typeface="Helvetica Neue"/>
         </a:defRPr>
       </a:lvl7pPr>
-      <a:lvl8pPr marL="4876800" marR="0" indent="-609600" algn="l" defTabSz="2438338" rtl="0" latinLnBrk="0">
+      <a:lvl8pPr marL="4876800" marR="0" indent="-609600" algn="l" defTabSz="2438337" rtl="0" latinLnBrk="0">
         <a:lnSpc>
           <a:spcPct val="90000"/>
         </a:lnSpc>
@@ -3901,13 +4078,13 @@
             <a:srgbClr val="000000"/>
           </a:solidFill>
           <a:uFillTx/>
-          <a:latin typeface="+mn-lt"/>
-          <a:ea typeface="+mn-ea"/>
-          <a:cs typeface="+mn-cs"/>
+          <a:latin typeface="+mj-lt"/>
+          <a:ea typeface="+mj-ea"/>
+          <a:cs typeface="+mj-cs"/>
           <a:sym typeface="Helvetica Neue"/>
         </a:defRPr>
       </a:lvl8pPr>
-      <a:lvl9pPr marL="5486400" marR="0" indent="-609600" algn="l" defTabSz="2438338" rtl="0" latinLnBrk="0">
+      <a:lvl9pPr marL="5486400" marR="0" indent="-609600" algn="l" defTabSz="2438337" rtl="0" latinLnBrk="0">
         <a:lnSpc>
           <a:spcPct val="90000"/>
         </a:lnSpc>
@@ -3927,9 +4104,9 @@
             <a:srgbClr val="000000"/>
           </a:solidFill>
           <a:uFillTx/>
-          <a:latin typeface="+mn-lt"/>
-          <a:ea typeface="+mn-ea"/>
-          <a:cs typeface="+mn-cs"/>
+          <a:latin typeface="+mj-lt"/>
+          <a:ea typeface="+mj-ea"/>
+          <a:cs typeface="+mj-cs"/>
           <a:sym typeface="Helvetica Neue"/>
         </a:defRPr>
       </a:lvl9pPr>
@@ -3961,7 +4138,7 @@
           <a:sym typeface="Helvetica Neue"/>
         </a:defRPr>
       </a:lvl1pPr>
-      <a:lvl2pPr marL="0" marR="0" indent="457200" algn="ctr" defTabSz="584200" rtl="0" latinLnBrk="0">
+      <a:lvl2pPr marL="0" marR="0" indent="0" algn="ctr" defTabSz="584200" rtl="0" latinLnBrk="0">
         <a:lnSpc>
           <a:spcPct val="100000"/>
         </a:lnSpc>
@@ -3987,7 +4164,7 @@
           <a:sym typeface="Helvetica Neue"/>
         </a:defRPr>
       </a:lvl2pPr>
-      <a:lvl3pPr marL="0" marR="0" indent="914400" algn="ctr" defTabSz="584200" rtl="0" latinLnBrk="0">
+      <a:lvl3pPr marL="0" marR="0" indent="0" algn="ctr" defTabSz="584200" rtl="0" latinLnBrk="0">
         <a:lnSpc>
           <a:spcPct val="100000"/>
         </a:lnSpc>
@@ -4013,7 +4190,7 @@
           <a:sym typeface="Helvetica Neue"/>
         </a:defRPr>
       </a:lvl3pPr>
-      <a:lvl4pPr marL="0" marR="0" indent="1371600" algn="ctr" defTabSz="584200" rtl="0" latinLnBrk="0">
+      <a:lvl4pPr marL="0" marR="0" indent="0" algn="ctr" defTabSz="584200" rtl="0" latinLnBrk="0">
         <a:lnSpc>
           <a:spcPct val="100000"/>
         </a:lnSpc>
@@ -4039,7 +4216,7 @@
           <a:sym typeface="Helvetica Neue"/>
         </a:defRPr>
       </a:lvl4pPr>
-      <a:lvl5pPr marL="0" marR="0" indent="1828800" algn="ctr" defTabSz="584200" rtl="0" latinLnBrk="0">
+      <a:lvl5pPr marL="0" marR="0" indent="0" algn="ctr" defTabSz="584200" rtl="0" latinLnBrk="0">
         <a:lnSpc>
           <a:spcPct val="100000"/>
         </a:lnSpc>
@@ -4065,7 +4242,7 @@
           <a:sym typeface="Helvetica Neue"/>
         </a:defRPr>
       </a:lvl5pPr>
-      <a:lvl6pPr marL="0" marR="0" indent="2286000" algn="ctr" defTabSz="584200" rtl="0" latinLnBrk="0">
+      <a:lvl6pPr marL="0" marR="0" indent="0" algn="ctr" defTabSz="584200" rtl="0" latinLnBrk="0">
         <a:lnSpc>
           <a:spcPct val="100000"/>
         </a:lnSpc>
@@ -4091,7 +4268,7 @@
           <a:sym typeface="Helvetica Neue"/>
         </a:defRPr>
       </a:lvl6pPr>
-      <a:lvl7pPr marL="0" marR="0" indent="2743200" algn="ctr" defTabSz="584200" rtl="0" latinLnBrk="0">
+      <a:lvl7pPr marL="0" marR="0" indent="0" algn="ctr" defTabSz="584200" rtl="0" latinLnBrk="0">
         <a:lnSpc>
           <a:spcPct val="100000"/>
         </a:lnSpc>
@@ -4117,7 +4294,7 @@
           <a:sym typeface="Helvetica Neue"/>
         </a:defRPr>
       </a:lvl7pPr>
-      <a:lvl8pPr marL="0" marR="0" indent="3200400" algn="ctr" defTabSz="584200" rtl="0" latinLnBrk="0">
+      <a:lvl8pPr marL="0" marR="0" indent="0" algn="ctr" defTabSz="584200" rtl="0" latinLnBrk="0">
         <a:lnSpc>
           <a:spcPct val="100000"/>
         </a:lnSpc>
@@ -4143,7 +4320,7 @@
           <a:sym typeface="Helvetica Neue"/>
         </a:defRPr>
       </a:lvl8pPr>
-      <a:lvl9pPr marL="0" marR="0" indent="3657600" algn="ctr" defTabSz="584200" rtl="0" latinLnBrk="0">
+      <a:lvl9pPr marL="0" marR="0" indent="0" algn="ctr" defTabSz="584200" rtl="0" latinLnBrk="0">
         <a:lnSpc>
           <a:spcPct val="100000"/>
         </a:lnSpc>
@@ -4196,10 +4373,14 @@
           <p:cNvPr id="171" name="Генератор кода"/>
           <p:cNvSpPr txBox="1"/>
           <p:nvPr>
-            <p:ph type="ctrTitle"/>
-          </p:nvPr>
-        </p:nvSpPr>
-        <p:spPr>
+            <p:ph type="title"/>
+          </p:nvPr>
+        </p:nvSpPr>
+        <p:spPr>
+          <a:xfrm>
+            <a:off x="1206495" y="2574990"/>
+            <a:ext cx="21971006" cy="4648203"/>
+          </a:xfrm>
           <a:prstGeom prst="rect">
             <a:avLst/>
           </a:prstGeom>
@@ -4207,7 +4388,9 @@
         <p:txBody>
           <a:bodyPr/>
           <a:lstStyle>
-            <a:lvl1pPr algn="ctr"/>
+            <a:lvl1pPr algn="ctr">
+              <a:defRPr spc="-300"/>
+            </a:lvl1pPr>
           </a:lstStyle>
           <a:p>
             <a:pPr/>
@@ -4252,13 +4435,21 @@
           </p:nvPr>
         </p:nvSpPr>
         <p:spPr>
+          <a:xfrm>
+            <a:off x="1206500" y="1079499"/>
+            <a:ext cx="21971000" cy="1433165"/>
+          </a:xfrm>
           <a:prstGeom prst="rect">
             <a:avLst/>
           </a:prstGeom>
         </p:spPr>
         <p:txBody>
           <a:bodyPr/>
-          <a:lstStyle/>
+          <a:lstStyle>
+            <a:lvl1pPr>
+              <a:defRPr spc="-200"/>
+            </a:lvl1pPr>
+          </a:lstStyle>
           <a:p>
             <a:pPr/>
             <a:r>
@@ -4285,48 +4476,73 @@
           </a:prstGeom>
         </p:spPr>
         <p:txBody>
-          <a:bodyPr/>
+          <a:bodyPr lIns="50800" tIns="50800" rIns="50800" bIns="50800"/>
           <a:lstStyle/>
           <a:p>
-            <a:pPr marL="0" indent="0">
-              <a:buSzTx/>
-              <a:buNone/>
+            <a:pPr defTabSz="2438337">
+              <a:lnSpc>
+                <a:spcPct val="90000"/>
+              </a:lnSpc>
+              <a:spcBef>
+                <a:spcPts val="4500"/>
+              </a:spcBef>
+              <a:defRPr b="0" sz="4800"/>
             </a:pPr>
             <a:r>
               <a:t>Двухместные операции (ADD, SUB, MUL, DIV, MOD) заменяют два операнд с вершины стека результатом выполнения операции.</a:t>
             </a:r>
           </a:p>
           <a:p>
-            <a:pPr marL="0" indent="0">
-              <a:buSzTx/>
-              <a:buNone/>
+            <a:pPr defTabSz="2438337">
+              <a:lnSpc>
+                <a:spcPct val="90000"/>
+              </a:lnSpc>
+              <a:spcBef>
+                <a:spcPts val="4500"/>
+              </a:spcBef>
+              <a:defRPr b="0" sz="4800"/>
             </a:pPr>
             <a:r>
               <a:t>Операция NEG меняет знак операнд на вершине стека.</a:t>
             </a:r>
           </a:p>
           <a:p>
-            <a:pPr marL="0" indent="0">
-              <a:buSzTx/>
-              <a:buNone/>
+            <a:pPr defTabSz="2438337">
+              <a:lnSpc>
+                <a:spcPct val="90000"/>
+              </a:lnSpc>
+              <a:spcBef>
+                <a:spcPts val="4500"/>
+              </a:spcBef>
+              <a:defRPr b="0" sz="4800"/>
             </a:pPr>
             <a:r>
               <a:t>Команда LOAD загружает на вершину стека значение, хранящееся в памяти по указанному адресу A.</a:t>
             </a:r>
           </a:p>
           <a:p>
-            <a:pPr marL="0" indent="0">
-              <a:buSzTx/>
-              <a:buNone/>
+            <a:pPr defTabSz="2438337">
+              <a:lnSpc>
+                <a:spcPct val="90000"/>
+              </a:lnSpc>
+              <a:spcBef>
+                <a:spcPts val="4500"/>
+              </a:spcBef>
+              <a:defRPr b="0" sz="4800"/>
             </a:pPr>
             <a:r>
               <a:t>Команда SAVE сохраняет взятое со стека значение по адресу A. Перед выполнением SAVE на вершине стека должно быть сохраняемое значение, а под ним адрес.</a:t>
             </a:r>
           </a:p>
           <a:p>
-            <a:pPr marL="0" indent="0">
-              <a:buSzTx/>
-              <a:buNone/>
+            <a:pPr defTabSz="2438337">
+              <a:lnSpc>
+                <a:spcPct val="90000"/>
+              </a:lnSpc>
+              <a:spcBef>
+                <a:spcPts val="4500"/>
+              </a:spcBef>
+              <a:defRPr b="0" sz="4800"/>
             </a:pPr>
             <a:r>
               <a:t>Команда DUP - дублирует значение на вершине стека.</a:t>
@@ -4369,13 +4585,21 @@
           </p:nvPr>
         </p:nvSpPr>
         <p:spPr>
+          <a:xfrm>
+            <a:off x="1206500" y="1079499"/>
+            <a:ext cx="21971000" cy="1433165"/>
+          </a:xfrm>
           <a:prstGeom prst="rect">
             <a:avLst/>
           </a:prstGeom>
         </p:spPr>
         <p:txBody>
           <a:bodyPr/>
-          <a:lstStyle/>
+          <a:lstStyle>
+            <a:lvl1pPr>
+              <a:defRPr spc="-200"/>
+            </a:lvl1pPr>
+          </a:lstStyle>
           <a:p>
             <a:pPr/>
             <a:r>
@@ -4395,55 +4619,80 @@
         <p:spPr>
           <a:xfrm>
             <a:off x="1206500" y="3519366"/>
-            <a:ext cx="21971000" cy="9170373"/>
+            <a:ext cx="21971000" cy="9170374"/>
           </a:xfrm>
           <a:prstGeom prst="rect">
             <a:avLst/>
           </a:prstGeom>
         </p:spPr>
         <p:txBody>
-          <a:bodyPr/>
+          <a:bodyPr lIns="50800" tIns="50800" rIns="50800" bIns="50800"/>
           <a:lstStyle/>
           <a:p>
-            <a:pPr marL="0" indent="0">
-              <a:buSzTx/>
-              <a:buNone/>
+            <a:pPr defTabSz="2438337">
+              <a:lnSpc>
+                <a:spcPct val="90000"/>
+              </a:lnSpc>
+              <a:spcBef>
+                <a:spcPts val="4500"/>
+              </a:spcBef>
+              <a:defRPr b="0" sz="4800"/>
             </a:pPr>
             <a:r>
               <a:t>Команда DROP - уничтожает верхний элемент.</a:t>
             </a:r>
           </a:p>
           <a:p>
-            <a:pPr marL="0" indent="0">
-              <a:buSzTx/>
-              <a:buNone/>
+            <a:pPr defTabSz="2438337">
+              <a:lnSpc>
+                <a:spcPct val="90000"/>
+              </a:lnSpc>
+              <a:spcBef>
+                <a:spcPts val="4500"/>
+              </a:spcBef>
+              <a:defRPr b="0" sz="4800"/>
             </a:pPr>
             <a:r>
               <a:t>Команда SWAP - меняет местами два верхних элементам стека.</a:t>
             </a:r>
           </a:p>
           <a:p>
-            <a:pPr marL="0" indent="0">
-              <a:buSzTx/>
-              <a:buNone/>
+            <a:pPr defTabSz="2438337">
+              <a:lnSpc>
+                <a:spcPct val="90000"/>
+              </a:lnSpc>
+              <a:spcBef>
+                <a:spcPts val="4500"/>
+              </a:spcBef>
+              <a:defRPr b="0" sz="4800"/>
             </a:pPr>
             <a:r>
               <a:t>Команда OVER - дублирует на вершине стека элемент, находившийся под вершиной.</a:t>
             </a:r>
           </a:p>
           <a:p>
-            <a:pPr marL="0" indent="0">
-              <a:buSzTx/>
-              <a:buNone/>
+            <a:pPr defTabSz="2438337">
+              <a:lnSpc>
+                <a:spcPct val="90000"/>
+              </a:lnSpc>
+              <a:spcBef>
+                <a:spcPts val="4500"/>
+              </a:spcBef>
+              <a:defRPr b="0" sz="4800"/>
             </a:pPr>
             <a:r>
               <a:t>Команда GOTO - выполняет переход по адресу, находящемуся на вершине стека (по сути PC присваиваем значение адреса с вершины стека).</a:t>
             </a:r>
           </a:p>
           <a:p>
-            <a:pPr marL="0" indent="0">
-              <a:buSzTx/>
-              <a:buNone/>
+            <a:pPr defTabSz="2438337">
+              <a:lnSpc>
+                <a:spcPct val="90000"/>
+              </a:lnSpc>
+              <a:spcBef>
+                <a:spcPts val="4500"/>
+              </a:spcBef>
+              <a:defRPr b="0" sz="4800"/>
             </a:pPr>
             <a:r>
               <a:t>Условные операции - требуется наличие трех операндов в стеке, самый верхний операнд это адрес, по которому осуществляется переход, если выполняется отношение между двумя следующими операндами.</a:t>
@@ -4486,13 +4735,21 @@
           </p:nvPr>
         </p:nvSpPr>
         <p:spPr>
+          <a:xfrm>
+            <a:off x="1206500" y="1079499"/>
+            <a:ext cx="21971000" cy="1433165"/>
+          </a:xfrm>
           <a:prstGeom prst="rect">
             <a:avLst/>
           </a:prstGeom>
         </p:spPr>
         <p:txBody>
           <a:bodyPr/>
-          <a:lstStyle/>
+          <a:lstStyle>
+            <a:lvl1pPr>
+              <a:defRPr spc="-200"/>
+            </a:lvl1pPr>
+          </a:lstStyle>
           <a:p>
             <a:pPr/>
             <a:r>
@@ -4519,21 +4776,116 @@
           </a:prstGeom>
         </p:spPr>
         <p:txBody>
+          <a:bodyPr lIns="50800" tIns="50800" rIns="50800" bIns="50800"/>
+          <a:lstStyle>
+            <a:lvl1pPr defTabSz="2438337">
+              <a:lnSpc>
+                <a:spcPct val="90000"/>
+              </a:lnSpc>
+              <a:spcBef>
+                <a:spcPts val="4500"/>
+              </a:spcBef>
+              <a:defRPr b="0" sz="4800"/>
+            </a:lvl1pPr>
+          </a:lstStyle>
+          <a:p>
+            <a:pPr/>
+            <a:r>
+              <a:t>Давайте рассмотрим работу генератора кода на небольшом примере.</a:t>
+            </a:r>
+          </a:p>
+        </p:txBody>
+      </p:sp>
+    </p:spTree>
+  </p:cSld>
+  <p:clrMapOvr>
+    <a:masterClrMapping/>
+  </p:clrMapOvr>
+  <p:transition xmlns:p14="http://schemas.microsoft.com/office/powerpoint/2010/main" spd="med" advClick="1"/>
+</p:sld>
+</file>
+
+<file path=ppt/slides/slide13.xml><?xml version="1.0" encoding="utf-8"?>
+<p:sld xmlns:a="http://schemas.openxmlformats.org/drawingml/2006/main" xmlns:r="http://schemas.openxmlformats.org/officeDocument/2006/relationships" xmlns:p="http://schemas.openxmlformats.org/presentationml/2006/main" xmlns:m="http://schemas.openxmlformats.org/officeDocument/2006/math" xmlns:a14="http://schemas.microsoft.com/office/drawing/2010/main" showMasterSp="1" showMasterPhAnim="1">
+  <p:cSld>
+    <p:spTree>
+      <p:nvGrpSpPr>
+        <p:cNvPr id="1" name=""/>
+        <p:cNvGrpSpPr/>
+        <p:nvPr/>
+      </p:nvGrpSpPr>
+      <p:grpSpPr>
+        <a:xfrm>
+          <a:off x="0" y="0"/>
+          <a:ext cx="0" cy="0"/>
+          <a:chOff x="0" y="0"/>
+          <a:chExt cx="0" cy="0"/>
+        </a:xfrm>
+      </p:grpSpPr>
+      <p:sp>
+        <p:nvSpPr>
+          <p:cNvPr id="204" name="Пример работы генератора кода"/>
+          <p:cNvSpPr txBox="1"/>
+          <p:nvPr>
+            <p:ph type="title"/>
+          </p:nvPr>
+        </p:nvSpPr>
+        <p:spPr>
+          <a:xfrm>
+            <a:off x="486677" y="959529"/>
+            <a:ext cx="7324526" cy="3911187"/>
+          </a:xfrm>
+          <a:prstGeom prst="rect">
+            <a:avLst/>
+          </a:prstGeom>
+        </p:spPr>
+        <p:txBody>
           <a:bodyPr/>
           <a:lstStyle>
-            <a:lvl1pPr marL="0" indent="0">
-              <a:buSzTx/>
-              <a:buNone/>
+            <a:lvl1pPr>
+              <a:defRPr spc="-200"/>
             </a:lvl1pPr>
           </a:lstStyle>
           <a:p>
             <a:pPr/>
             <a:r>
-              <a:t>Давайте рассмотрим работу генератора кода на небольшом примере.</a:t>
-            </a:r>
-          </a:p>
-        </p:txBody>
-      </p:sp>
+              <a:t>Схема трансляции оператора IF</a:t>
+            </a:r>
+          </a:p>
+        </p:txBody>
+      </p:sp>
+      <p:pic>
+        <p:nvPicPr>
+          <p:cNvPr id="205" name="pasted-movie.png" descr="pasted-movie.png"/>
+          <p:cNvPicPr>
+            <a:picLocks noChangeAspect="1"/>
+          </p:cNvPicPr>
+          <p:nvPr/>
+        </p:nvPicPr>
+        <p:blipFill>
+          <a:blip r:embed="rId2">
+            <a:extLst/>
+          </a:blip>
+          <a:stretch>
+            <a:fillRect/>
+          </a:stretch>
+        </p:blipFill>
+        <p:spPr>
+          <a:xfrm>
+            <a:off x="7798465" y="362701"/>
+            <a:ext cx="16482931" cy="12990598"/>
+          </a:xfrm>
+          <a:prstGeom prst="rect">
+            <a:avLst/>
+          </a:prstGeom>
+          <a:ln w="63500">
+            <a:solidFill>
+              <a:srgbClr val="000000"/>
+            </a:solidFill>
+            <a:miter lim="400000"/>
+          </a:ln>
+        </p:spPr>
+      </p:pic>
     </p:spTree>
   </p:cSld>
   <p:clrMapOvr>
@@ -4569,13 +4921,21 @@
           </p:nvPr>
         </p:nvSpPr>
         <p:spPr>
+          <a:xfrm>
+            <a:off x="1206500" y="1079499"/>
+            <a:ext cx="21971000" cy="1433165"/>
+          </a:xfrm>
           <a:prstGeom prst="rect">
             <a:avLst/>
           </a:prstGeom>
         </p:spPr>
         <p:txBody>
           <a:bodyPr/>
-          <a:lstStyle/>
+          <a:lstStyle>
+            <a:lvl1pPr>
+              <a:defRPr spc="-200"/>
+            </a:lvl1pPr>
+          </a:lstStyle>
           <a:p>
             <a:pPr/>
             <a:r>
@@ -4602,39 +4962,59 @@
           </a:prstGeom>
         </p:spPr>
         <p:txBody>
-          <a:bodyPr/>
+          <a:bodyPr lIns="50800" tIns="50800" rIns="50800" bIns="50800"/>
           <a:lstStyle/>
           <a:p>
-            <a:pPr marL="0" indent="0">
-              <a:buSzTx/>
-              <a:buNone/>
+            <a:pPr defTabSz="2438337">
+              <a:lnSpc>
+                <a:spcPct val="90000"/>
+              </a:lnSpc>
+              <a:spcBef>
+                <a:spcPts val="4500"/>
+              </a:spcBef>
+              <a:defRPr b="0" sz="4800"/>
             </a:pPr>
             <a:r>
               <a:t>Мы не будем рассматривать генерацию кода для реального процессора. Это сопряжено с множеством трудностей. </a:t>
             </a:r>
           </a:p>
           <a:p>
-            <a:pPr marL="0" indent="0">
-              <a:buSzTx/>
-              <a:buNone/>
+            <a:pPr defTabSz="2438337">
+              <a:lnSpc>
+                <a:spcPct val="90000"/>
+              </a:lnSpc>
+              <a:spcBef>
+                <a:spcPts val="4500"/>
+              </a:spcBef>
+              <a:defRPr b="0" sz="4800"/>
             </a:pPr>
             <a:r>
               <a:t>Вместо этого напишем программу, которая будет имитировать работу простенького процессора. Наш компилятор сможет работать на любой архитектуре процессора, за счет реализации программного-виртуального процессора. Нужен лишь компилятор C++, для запуска программы.</a:t>
             </a:r>
           </a:p>
           <a:p>
-            <a:pPr marL="0" indent="0">
-              <a:buSzTx/>
-              <a:buNone/>
+            <a:pPr defTabSz="2438337">
+              <a:lnSpc>
+                <a:spcPct val="90000"/>
+              </a:lnSpc>
+              <a:spcBef>
+                <a:spcPts val="4500"/>
+              </a:spcBef>
+              <a:defRPr b="0" sz="4800"/>
             </a:pPr>
             <a:r>
               <a:t>Несуществующий абстрактный компьютер, работа которого реализуется на реальной машине с помощью программных средств называется виртуальной машиной.</a:t>
             </a:r>
           </a:p>
           <a:p>
-            <a:pPr marL="0" indent="0">
-              <a:buSzTx/>
-              <a:buNone/>
+            <a:pPr defTabSz="2438337">
+              <a:lnSpc>
+                <a:spcPct val="90000"/>
+              </a:lnSpc>
+              <a:spcBef>
+                <a:spcPts val="4500"/>
+              </a:spcBef>
+              <a:defRPr b="0" sz="4800"/>
             </a:pPr>
             <a:r>
               <a:t>Наш компьютер будет называться - ОВМ.</a:t>
@@ -4677,13 +5057,21 @@
           </p:nvPr>
         </p:nvSpPr>
         <p:spPr>
+          <a:xfrm>
+            <a:off x="1206500" y="1079499"/>
+            <a:ext cx="21971000" cy="1433165"/>
+          </a:xfrm>
           <a:prstGeom prst="rect">
             <a:avLst/>
           </a:prstGeom>
         </p:spPr>
         <p:txBody>
           <a:bodyPr/>
-          <a:lstStyle/>
+          <a:lstStyle>
+            <a:lvl1pPr>
+              <a:defRPr spc="-200"/>
+            </a:lvl1pPr>
+          </a:lstStyle>
           <a:p>
             <a:pPr/>
             <a:r>
@@ -4710,21 +5098,31 @@
           </a:prstGeom>
         </p:spPr>
         <p:txBody>
-          <a:bodyPr/>
+          <a:bodyPr lIns="50800" tIns="50800" rIns="50800" bIns="50800"/>
           <a:lstStyle/>
           <a:p>
-            <a:pPr marL="0" indent="0">
-              <a:buSzTx/>
-              <a:buNone/>
+            <a:pPr defTabSz="2438337">
+              <a:lnSpc>
+                <a:spcPct val="90000"/>
+              </a:lnSpc>
+              <a:spcBef>
+                <a:spcPts val="4500"/>
+              </a:spcBef>
+              <a:defRPr b="0" sz="4800"/>
             </a:pPr>
             <a:r>
               <a:t>ОВМ будет содержать процессор и память. Процессор способен выполнять определенный набор команд, а также содержит ряд регистров в памяти. Также в памяти будет храниться программа и данные.</a:t>
             </a:r>
           </a:p>
           <a:p>
-            <a:pPr marL="0" indent="0">
-              <a:buSzTx/>
-              <a:buNone/>
+            <a:pPr defTabSz="2438337">
+              <a:lnSpc>
+                <a:spcPct val="90000"/>
+              </a:lnSpc>
+              <a:spcBef>
+                <a:spcPts val="4500"/>
+              </a:spcBef>
+              <a:defRPr b="0" sz="4800"/>
             </a:pPr>
             <a:r>
               <a:t>В языке О есть данные только целого типа, поэтому память будет состоять из слов-ячеек, каждая из которых хранит в себе одно целое число. Каждое слово имеет уникальный адрес, который выражается целым числом.</a:t>
@@ -4776,8 +5174,8 @@
         </p:blipFill>
         <p:spPr>
           <a:xfrm>
-            <a:off x="3576025" y="791650"/>
-            <a:ext cx="17231950" cy="12132700"/>
+            <a:off x="3576025" y="791649"/>
+            <a:ext cx="17231950" cy="12132701"/>
           </a:xfrm>
           <a:prstGeom prst="rect">
             <a:avLst/>
@@ -4825,13 +5223,21 @@
           </p:nvPr>
         </p:nvSpPr>
         <p:spPr>
+          <a:xfrm>
+            <a:off x="1206500" y="1079499"/>
+            <a:ext cx="21971000" cy="1433165"/>
+          </a:xfrm>
           <a:prstGeom prst="rect">
             <a:avLst/>
           </a:prstGeom>
         </p:spPr>
         <p:txBody>
           <a:bodyPr/>
-          <a:lstStyle/>
+          <a:lstStyle>
+            <a:lvl1pPr>
+              <a:defRPr spc="-200"/>
+            </a:lvl1pPr>
+          </a:lstStyle>
           <a:p>
             <a:pPr/>
             <a:r>
@@ -4858,30 +5264,45 @@
           </a:prstGeom>
         </p:spPr>
         <p:txBody>
-          <a:bodyPr/>
+          <a:bodyPr lIns="50800" tIns="50800" rIns="50800" bIns="50800"/>
           <a:lstStyle/>
           <a:p>
-            <a:pPr marL="0" indent="0">
-              <a:buSzTx/>
-              <a:buNone/>
+            <a:pPr defTabSz="2438337">
+              <a:lnSpc>
+                <a:spcPct val="90000"/>
+              </a:lnSpc>
+              <a:spcBef>
+                <a:spcPts val="4500"/>
+              </a:spcBef>
+              <a:defRPr b="0" sz="4800"/>
             </a:pPr>
             <a:r>
               <a:t>В качестве виртуального процессора будем использовать стековую машину с безадресной системой команд. Программа для такой машины представляет собой последовательность операндов и операций, соответствующих обратной польской записи программы.</a:t>
             </a:r>
           </a:p>
           <a:p>
-            <a:pPr marL="0" indent="0">
-              <a:buSzTx/>
-              <a:buNone/>
+            <a:pPr defTabSz="2438337">
+              <a:lnSpc>
+                <a:spcPct val="90000"/>
+              </a:lnSpc>
+              <a:spcBef>
+                <a:spcPts val="4500"/>
+              </a:spcBef>
+              <a:defRPr b="0" sz="4800"/>
             </a:pPr>
             <a:r>
               <a:t>Операнд заносятся в стек, операции выполняются над верхними элементами стека, результат операции заменяет собой верхние операнды.</a:t>
             </a:r>
           </a:p>
           <a:p>
-            <a:pPr marL="0" indent="0">
-              <a:buSzTx/>
-              <a:buNone/>
+            <a:pPr defTabSz="2438337">
+              <a:lnSpc>
+                <a:spcPct val="90000"/>
+              </a:lnSpc>
+              <a:spcBef>
+                <a:spcPts val="4500"/>
+              </a:spcBef>
+              <a:defRPr b="0" sz="4800"/>
             </a:pPr>
             <a:r>
               <a:t>Каждый операнд, это одно слово в памяти. Для различий операндов и операций в стеке, предусмотрим кодирование операций отрицательными числами, соответсвенно не может быть указан отрицательный операнд в стеке. Для указания ударного минуса будет использоваться специальная операция.</a:t>
@@ -4924,13 +5345,21 @@
           </p:nvPr>
         </p:nvSpPr>
         <p:spPr>
+          <a:xfrm>
+            <a:off x="1206500" y="1079499"/>
+            <a:ext cx="21971000" cy="1433165"/>
+          </a:xfrm>
           <a:prstGeom prst="rect">
             <a:avLst/>
           </a:prstGeom>
         </p:spPr>
         <p:txBody>
           <a:bodyPr/>
-          <a:lstStyle/>
+          <a:lstStyle>
+            <a:lvl1pPr>
+              <a:defRPr spc="-200"/>
+            </a:lvl1pPr>
+          </a:lstStyle>
           <a:p>
             <a:pPr/>
             <a:r>
@@ -4957,21 +5386,31 @@
           </a:prstGeom>
         </p:spPr>
         <p:txBody>
-          <a:bodyPr/>
+          <a:bodyPr lIns="50800" tIns="50800" rIns="50800" bIns="50800"/>
           <a:lstStyle/>
           <a:p>
-            <a:pPr marL="0" indent="0">
-              <a:buSzTx/>
-              <a:buNone/>
+            <a:pPr defTabSz="2438337">
+              <a:lnSpc>
+                <a:spcPct val="90000"/>
+              </a:lnSpc>
+              <a:spcBef>
+                <a:spcPts val="4500"/>
+              </a:spcBef>
+              <a:defRPr b="0" sz="4800"/>
             </a:pPr>
             <a:r>
               <a:t>Команды программы располагаются в памяти ОВМ. Процессор выполняют команды одну за другой, начиная с команды по адресу 0.</a:t>
             </a:r>
           </a:p>
           <a:p>
-            <a:pPr marL="0" indent="0">
-              <a:buSzTx/>
-              <a:buNone/>
+            <a:pPr defTabSz="2438337">
+              <a:lnSpc>
+                <a:spcPct val="90000"/>
+              </a:lnSpc>
+              <a:spcBef>
+                <a:spcPts val="4500"/>
+              </a:spcBef>
+              <a:defRPr b="0" sz="4800"/>
             </a:pPr>
             <a:r>
               <a:t>Адрес очередной команды для исполнения, записан в регистре процессора, обозначаемом PC (program counter). </a:t>
@@ -5014,13 +5453,21 @@
           </p:nvPr>
         </p:nvSpPr>
         <p:spPr>
+          <a:xfrm>
+            <a:off x="1206500" y="1079499"/>
+            <a:ext cx="21971000" cy="1433165"/>
+          </a:xfrm>
           <a:prstGeom prst="rect">
             <a:avLst/>
           </a:prstGeom>
         </p:spPr>
         <p:txBody>
           <a:bodyPr/>
-          <a:lstStyle/>
+          <a:lstStyle>
+            <a:lvl1pPr>
+              <a:defRPr spc="-200"/>
+            </a:lvl1pPr>
+          </a:lstStyle>
           <a:p>
             <a:pPr/>
             <a:r>
@@ -5047,30 +5494,45 @@
           </a:prstGeom>
         </p:spPr>
         <p:txBody>
-          <a:bodyPr/>
+          <a:bodyPr lIns="50800" tIns="50800" rIns="50800" bIns="50800"/>
           <a:lstStyle/>
           <a:p>
-            <a:pPr marL="0" indent="0">
-              <a:buSzTx/>
-              <a:buNone/>
+            <a:pPr defTabSz="2438337">
+              <a:lnSpc>
+                <a:spcPct val="90000"/>
+              </a:lnSpc>
+              <a:spcBef>
+                <a:spcPts val="4500"/>
+              </a:spcBef>
+              <a:defRPr b="0" sz="4800"/>
             </a:pPr>
             <a:r>
               <a:t>Стек, используемый ОВМ для вычисления, будет находиться в старших адресах памяти.</a:t>
             </a:r>
           </a:p>
           <a:p>
-            <a:pPr marL="0" indent="0">
-              <a:buSzTx/>
-              <a:buNone/>
+            <a:pPr defTabSz="2438337">
+              <a:lnSpc>
+                <a:spcPct val="90000"/>
+              </a:lnSpc>
+              <a:spcBef>
+                <a:spcPts val="4500"/>
+              </a:spcBef>
+              <a:defRPr b="0" sz="4800"/>
             </a:pPr>
             <a:r>
               <a:t>На текущую вершину указывает регистр процессора SP (stack pointer). SP указывает на адрес ячейки, являющейся вершиной стека.</a:t>
             </a:r>
           </a:p>
           <a:p>
-            <a:pPr marL="0" indent="0">
-              <a:buSzTx/>
-              <a:buNone/>
+            <a:pPr defTabSz="2438337">
+              <a:lnSpc>
+                <a:spcPct val="90000"/>
+              </a:lnSpc>
+              <a:spcBef>
+                <a:spcPts val="4500"/>
+              </a:spcBef>
+              <a:defRPr b="0" sz="4800"/>
             </a:pPr>
             <a:r>
               <a:t>Значение SP уменьшается при добавлении элементов в стек.</a:t>
@@ -5114,8 +5576,8 @@
         </p:nvSpPr>
         <p:spPr>
           <a:xfrm>
-            <a:off x="306021" y="131628"/>
-            <a:ext cx="21971001" cy="1433163"/>
+            <a:off x="306021" y="131627"/>
+            <a:ext cx="21971002" cy="1433165"/>
           </a:xfrm>
           <a:prstGeom prst="rect">
             <a:avLst/>
@@ -5123,7 +5585,11 @@
         </p:spPr>
         <p:txBody>
           <a:bodyPr/>
-          <a:lstStyle/>
+          <a:lstStyle>
+            <a:lvl1pPr>
+              <a:defRPr spc="-200"/>
+            </a:lvl1pPr>
+          </a:lstStyle>
           <a:p>
             <a:pPr/>
             <a:r>
@@ -5150,8 +5616,8 @@
         </p:blipFill>
         <p:spPr>
           <a:xfrm>
-            <a:off x="4067352" y="1709959"/>
-            <a:ext cx="16249296" cy="11544841"/>
+            <a:off x="4067352" y="1709958"/>
+            <a:ext cx="16249297" cy="11544843"/>
           </a:xfrm>
           <a:prstGeom prst="rect">
             <a:avLst/>
@@ -5205,8 +5671,8 @@
         </p:blipFill>
         <p:spPr>
           <a:xfrm>
-            <a:off x="6435685" y="210942"/>
-            <a:ext cx="11512630" cy="13294116"/>
+            <a:off x="6435685" y="210941"/>
+            <a:ext cx="11512630" cy="13294117"/>
           </a:xfrm>
           <a:prstGeom prst="rect">
             <a:avLst/>
@@ -5236,10 +5702,10 @@
         <a:srgbClr val="FFFFFF"/>
       </a:lt1>
       <a:dk2>
-        <a:srgbClr val="5E5E5E"/>
+        <a:srgbClr val="A7A7A7"/>
       </a:dk2>
       <a:lt2>
-        <a:srgbClr val="D5D5D5"/>
+        <a:srgbClr val="535353"/>
       </a:lt2>
       <a:accent1>
         <a:srgbClr val="00A2FF"/>
@@ -5273,9 +5739,9 @@
         <a:cs typeface="Helvetica Neue"/>
       </a:majorFont>
       <a:minorFont>
-        <a:latin typeface="Helvetica Neue"/>
-        <a:ea typeface="Helvetica Neue"/>
-        <a:cs typeface="Helvetica Neue"/>
+        <a:latin typeface="Helvetica"/>
+        <a:ea typeface="Helvetica"/>
+        <a:cs typeface="Helvetica"/>
       </a:minorFont>
     </a:fontScheme>
     <a:fmtScheme name="33_DynamicLight">
@@ -5416,11 +5882,14 @@
     <a:spDef>
       <a:spPr>
         <a:solidFill>
-          <a:srgbClr val="000000"/>
+          <a:srgbClr val="FFFFFF"/>
         </a:solidFill>
-        <a:ln w="12700" cap="flat">
-          <a:noFill/>
-          <a:miter lim="400000"/>
+        <a:ln w="25400" cap="flat">
+          <a:solidFill>
+            <a:schemeClr val="accent1"/>
+          </a:solidFill>
+          <a:prstDash val="solid"/>
+          <a:round/>
         </a:ln>
         <a:effectLst/>
         <a:sp3d/>
@@ -5429,12 +5898,12 @@
         <a:spAutoFit/>
       </a:bodyPr>
       <a:lstStyle>
-        <a:defPPr marL="0" marR="0" indent="0" algn="ctr" defTabSz="825500" rtl="0" fontAlgn="auto" latinLnBrk="0" hangingPunct="0">
+        <a:defPPr marL="0" marR="0" indent="0" algn="l" defTabSz="2438337" rtl="0" fontAlgn="auto" latinLnBrk="0" hangingPunct="0">
           <a:lnSpc>
-            <a:spcPct val="100000"/>
+            <a:spcPct val="90000"/>
           </a:lnSpc>
           <a:spcBef>
-            <a:spcPts val="0"/>
+            <a:spcPts val="4500"/>
           </a:spcBef>
           <a:spcAft>
             <a:spcPts val="0"/>
@@ -5444,19 +5913,19 @@
           <a:buFontTx/>
           <a:buNone/>
           <a:tabLst/>
-          <a:defRPr b="0" baseline="0" cap="none" i="0" spc="0" strike="noStrike" sz="3200" u="none" kumimoji="0" normalizeH="0">
+          <a:defRPr b="0" baseline="0" cap="none" i="0" spc="0" strike="noStrike" sz="4800" u="none" kumimoji="0" normalizeH="0">
             <a:ln>
               <a:noFill/>
             </a:ln>
             <a:solidFill>
-              <a:srgbClr val="FFFFFF"/>
+              <a:srgbClr val="000000"/>
             </a:solidFill>
             <a:effectLst/>
             <a:uFillTx/>
-            <a:latin typeface="Helvetica Neue Medium"/>
-            <a:ea typeface="Helvetica Neue Medium"/>
-            <a:cs typeface="Helvetica Neue Medium"/>
-            <a:sym typeface="Helvetica Neue Medium"/>
+            <a:latin typeface="+mj-lt"/>
+            <a:ea typeface="+mj-ea"/>
+            <a:cs typeface="+mj-cs"/>
+            <a:sym typeface="Helvetica Neue"/>
           </a:defRPr>
         </a:defPPr>
         <a:lvl1pPr marL="0" marR="0" indent="0" algn="l" defTabSz="914400" rtl="0" fontAlgn="auto" latinLnBrk="1" hangingPunct="0">
@@ -5706,10 +6175,10 @@
         <a:noFill/>
         <a:ln w="25400" cap="flat">
           <a:solidFill>
-            <a:srgbClr val="000000"/>
+            <a:schemeClr val="accent1"/>
           </a:solidFill>
           <a:prstDash val="solid"/>
-          <a:miter lim="400000"/>
+          <a:round/>
         </a:ln>
         <a:effectLst/>
         <a:sp3d/>
@@ -6000,7 +6469,7 @@
         <a:spAutoFit/>
       </a:bodyPr>
       <a:lstStyle>
-        <a:defPPr marL="0" marR="0" indent="0" algn="l" defTabSz="2438338" rtl="0" fontAlgn="auto" latinLnBrk="0" hangingPunct="0">
+        <a:defPPr marL="0" marR="0" indent="0" algn="l" defTabSz="2438337" rtl="0" fontAlgn="auto" latinLnBrk="0" hangingPunct="0">
           <a:lnSpc>
             <a:spcPct val="90000"/>
           </a:lnSpc>
@@ -6024,9 +6493,9 @@
             </a:solidFill>
             <a:effectLst/>
             <a:uFillTx/>
-            <a:latin typeface="+mn-lt"/>
-            <a:ea typeface="+mn-ea"/>
-            <a:cs typeface="+mn-cs"/>
+            <a:latin typeface="+mj-lt"/>
+            <a:ea typeface="+mj-ea"/>
+            <a:cs typeface="+mj-cs"/>
             <a:sym typeface="Helvetica Neue"/>
           </a:defRPr>
         </a:defPPr>
@@ -6287,10 +6756,10 @@
         <a:srgbClr val="FFFFFF"/>
       </a:lt1>
       <a:dk2>
-        <a:srgbClr val="5E5E5E"/>
+        <a:srgbClr val="A7A7A7"/>
       </a:dk2>
       <a:lt2>
-        <a:srgbClr val="D5D5D5"/>
+        <a:srgbClr val="535353"/>
       </a:lt2>
       <a:accent1>
         <a:srgbClr val="00A2FF"/>
@@ -6324,9 +6793,9 @@
         <a:cs typeface="Helvetica Neue"/>
       </a:majorFont>
       <a:minorFont>
-        <a:latin typeface="Helvetica Neue"/>
-        <a:ea typeface="Helvetica Neue"/>
-        <a:cs typeface="Helvetica Neue"/>
+        <a:latin typeface="Helvetica"/>
+        <a:ea typeface="Helvetica"/>
+        <a:cs typeface="Helvetica"/>
       </a:minorFont>
     </a:fontScheme>
     <a:fmtScheme name="33_DynamicLight">
@@ -6467,11 +6936,14 @@
     <a:spDef>
       <a:spPr>
         <a:solidFill>
-          <a:srgbClr val="000000"/>
+          <a:srgbClr val="FFFFFF"/>
         </a:solidFill>
-        <a:ln w="12700" cap="flat">
-          <a:noFill/>
-          <a:miter lim="400000"/>
+        <a:ln w="25400" cap="flat">
+          <a:solidFill>
+            <a:schemeClr val="accent1"/>
+          </a:solidFill>
+          <a:prstDash val="solid"/>
+          <a:round/>
         </a:ln>
         <a:effectLst/>
         <a:sp3d/>
@@ -6480,12 +6952,12 @@
         <a:spAutoFit/>
       </a:bodyPr>
       <a:lstStyle>
-        <a:defPPr marL="0" marR="0" indent="0" algn="ctr" defTabSz="825500" rtl="0" fontAlgn="auto" latinLnBrk="0" hangingPunct="0">
+        <a:defPPr marL="0" marR="0" indent="0" algn="l" defTabSz="2438337" rtl="0" fontAlgn="auto" latinLnBrk="0" hangingPunct="0">
           <a:lnSpc>
-            <a:spcPct val="100000"/>
+            <a:spcPct val="90000"/>
           </a:lnSpc>
           <a:spcBef>
-            <a:spcPts val="0"/>
+            <a:spcPts val="4500"/>
           </a:spcBef>
           <a:spcAft>
             <a:spcPts val="0"/>
@@ -6495,19 +6967,19 @@
           <a:buFontTx/>
           <a:buNone/>
           <a:tabLst/>
-          <a:defRPr b="0" baseline="0" cap="none" i="0" spc="0" strike="noStrike" sz="3200" u="none" kumimoji="0" normalizeH="0">
+          <a:defRPr b="0" baseline="0" cap="none" i="0" spc="0" strike="noStrike" sz="4800" u="none" kumimoji="0" normalizeH="0">
             <a:ln>
               <a:noFill/>
             </a:ln>
             <a:solidFill>
-              <a:srgbClr val="FFFFFF"/>
+              <a:srgbClr val="000000"/>
             </a:solidFill>
             <a:effectLst/>
             <a:uFillTx/>
-            <a:latin typeface="Helvetica Neue Medium"/>
-            <a:ea typeface="Helvetica Neue Medium"/>
-            <a:cs typeface="Helvetica Neue Medium"/>
-            <a:sym typeface="Helvetica Neue Medium"/>
+            <a:latin typeface="+mj-lt"/>
+            <a:ea typeface="+mj-ea"/>
+            <a:cs typeface="+mj-cs"/>
+            <a:sym typeface="Helvetica Neue"/>
           </a:defRPr>
         </a:defPPr>
         <a:lvl1pPr marL="0" marR="0" indent="0" algn="l" defTabSz="914400" rtl="0" fontAlgn="auto" latinLnBrk="1" hangingPunct="0">
@@ -6757,10 +7229,10 @@
         <a:noFill/>
         <a:ln w="25400" cap="flat">
           <a:solidFill>
-            <a:srgbClr val="000000"/>
+            <a:schemeClr val="accent1"/>
           </a:solidFill>
           <a:prstDash val="solid"/>
-          <a:miter lim="400000"/>
+          <a:round/>
         </a:ln>
         <a:effectLst/>
         <a:sp3d/>
@@ -7051,7 +7523,7 @@
         <a:spAutoFit/>
       </a:bodyPr>
       <a:lstStyle>
-        <a:defPPr marL="0" marR="0" indent="0" algn="l" defTabSz="2438338" rtl="0" fontAlgn="auto" latinLnBrk="0" hangingPunct="0">
+        <a:defPPr marL="0" marR="0" indent="0" algn="l" defTabSz="2438337" rtl="0" fontAlgn="auto" latinLnBrk="0" hangingPunct="0">
           <a:lnSpc>
             <a:spcPct val="90000"/>
           </a:lnSpc>
@@ -7075,9 +7547,9 @@
             </a:solidFill>
             <a:effectLst/>
             <a:uFillTx/>
-            <a:latin typeface="+mn-lt"/>
-            <a:ea typeface="+mn-ea"/>
-            <a:cs typeface="+mn-cs"/>
+            <a:latin typeface="+mj-lt"/>
+            <a:ea typeface="+mj-ea"/>
+            <a:cs typeface="+mj-cs"/>
             <a:sym typeface="Helvetica Neue"/>
           </a:defRPr>
         </a:defPPr>
